--- a/public/fun/pack/pptx/news/카드뉴스_19_감사·칭찬_반딧불마을.pptx
+++ b/public/fun/pack/pptx/news/카드뉴스_19_감사·칭찬_반딧불마을.pptx
@@ -3287,14 +3287,6 @@
 <file path=ppt/slides/slide1.xml><?xml version="1.0" encoding="utf-8"?>
 <p:sld xmlns:a="http://schemas.openxmlformats.org/drawingml/2006/main" xmlns:p="http://schemas.openxmlformats.org/presentationml/2006/main" xmlns:r="http://schemas.openxmlformats.org/officeDocument/2006/relationships">
   <p:cSld>
-    <p:bg>
-      <p:bgPr>
-        <a:solidFill>
-          <a:srgbClr val="FFFFFF"/>
-        </a:solidFill>
-        <a:effectLst/>
-      </p:bgPr>
-    </p:bg>
     <p:spTree>
       <p:nvGrpSpPr>
         <p:cNvPr id="1" name=""/>
@@ -3302,238 +3294,30 @@
         <p:nvPr/>
       </p:nvGrpSpPr>
       <p:grpSpPr/>
-      <p:sp>
-        <p:nvSpPr>
-          <p:cNvPr id="3" name="장식"/>
-          <p:cNvSpPr/>
+      <p:pic>
+        <p:nvPicPr>
+          <p:cNvPr id="3" name="표지 그림" descr="news-19.jpg"/>
+          <p:cNvPicPr>
+            <a:picLocks noChangeAspect="1"/>
+          </p:cNvPicPr>
           <p:nvPr/>
-        </p:nvSpPr>
-        <p:spPr>
-          <a:xfrm>
-            <a:off x="3977639" y="-1714500"/>
-            <a:ext cx="7886700" cy="7886700"/>
-          </a:xfrm>
-          <a:prstGeom prst="ellipse">
+        </p:nvPicPr>
+        <p:blipFill>
+          <a:blip r:embed="rId2"/>
+          <a:stretch>
+            <a:fillRect/>
+          </a:stretch>
+        </p:blipFill>
+        <p:spPr>
+          <a:xfrm>
+            <a:off x="0" y="0"/>
+            <a:ext cx="6858000" cy="6858000"/>
+          </a:xfrm>
+          <a:prstGeom prst="rect">
             <a:avLst/>
           </a:prstGeom>
-          <a:solidFill>
-            <a:srgbClr val="D0F1E6"/>
-          </a:solidFill>
-          <a:ln>
-            <a:noFill/>
-          </a:ln>
-        </p:spPr>
-        <p:txBody>
-          <a:bodyPr rtlCol="0" anchor="ctr"/>
-          <a:lstStyle/>
-          <a:p>
-            <a:pPr algn="ctr"/>
-          </a:p>
-        </p:txBody>
-      </p:sp>
-      <p:sp>
-        <p:nvSpPr>
-          <p:cNvPr id="4" name="장식"/>
-          <p:cNvSpPr/>
-          <p:nvPr/>
-        </p:nvSpPr>
-        <p:spPr>
-          <a:xfrm>
-            <a:off x="5349240" y="3977639"/>
-            <a:ext cx="3429000" cy="3429000"/>
-          </a:xfrm>
-          <a:prstGeom prst="ellipse">
-            <a:avLst/>
-          </a:prstGeom>
-          <a:solidFill>
-            <a:srgbClr val="246B53"/>
-          </a:solidFill>
-          <a:ln>
-            <a:noFill/>
-          </a:ln>
-        </p:spPr>
-        <p:txBody>
-          <a:bodyPr rtlCol="0" anchor="ctr"/>
-          <a:lstStyle/>
-          <a:p>
-            <a:pPr algn="ctr"/>
-          </a:p>
-        </p:txBody>
-      </p:sp>
-      <p:sp>
-        <p:nvSpPr>
-          <p:cNvPr id="5" name="장식"/>
-          <p:cNvSpPr/>
-          <p:nvPr/>
-        </p:nvSpPr>
-        <p:spPr>
-          <a:xfrm rot="47073">
-            <a:off x="6103085" y="1303642"/>
-            <a:ext cx="972669" cy="972669"/>
-          </a:xfrm>
-          <a:prstGeom prst="star5">
-            <a:avLst/>
-          </a:prstGeom>
-          <a:solidFill>
-            <a:srgbClr val="246B53"/>
-          </a:solidFill>
-          <a:ln>
-            <a:noFill/>
-          </a:ln>
-        </p:spPr>
-        <p:txBody>
-          <a:bodyPr rtlCol="0" anchor="ctr"/>
-          <a:lstStyle/>
-          <a:p>
-            <a:pPr algn="ctr"/>
-          </a:p>
-        </p:txBody>
-      </p:sp>
-      <p:sp>
-        <p:nvSpPr>
-          <p:cNvPr id="6" name="장식"/>
-          <p:cNvSpPr/>
-          <p:nvPr/>
-        </p:nvSpPr>
-        <p:spPr>
-          <a:xfrm rot="616000">
-            <a:off x="6699100" y="404965"/>
-            <a:ext cx="415579" cy="415579"/>
-          </a:xfrm>
-          <a:prstGeom prst="star5">
-            <a:avLst/>
-          </a:prstGeom>
-          <a:solidFill>
-            <a:srgbClr val="D0F1E6"/>
-          </a:solidFill>
-          <a:ln>
-            <a:noFill/>
-          </a:ln>
-        </p:spPr>
-        <p:txBody>
-          <a:bodyPr rtlCol="0" anchor="ctr"/>
-          <a:lstStyle/>
-          <a:p>
-            <a:pPr algn="ctr"/>
-          </a:p>
-        </p:txBody>
-      </p:sp>
-      <p:sp>
-        <p:nvSpPr>
-          <p:cNvPr id="7" name="장식"/>
-          <p:cNvSpPr/>
-          <p:nvPr/>
-        </p:nvSpPr>
-        <p:spPr>
-          <a:xfrm rot="291727">
-            <a:off x="4250073" y="1857812"/>
-            <a:ext cx="743304" cy="743304"/>
-          </a:xfrm>
-          <a:prstGeom prst="star5">
-            <a:avLst/>
-          </a:prstGeom>
-          <a:solidFill>
-            <a:srgbClr val="913B83"/>
-          </a:solidFill>
-          <a:ln>
-            <a:noFill/>
-          </a:ln>
-        </p:spPr>
-        <p:txBody>
-          <a:bodyPr rtlCol="0" anchor="ctr"/>
-          <a:lstStyle/>
-          <a:p>
-            <a:pPr algn="ctr"/>
-          </a:p>
-        </p:txBody>
-      </p:sp>
-      <p:sp>
-        <p:nvSpPr>
-          <p:cNvPr id="8" name="장식"/>
-          <p:cNvSpPr/>
-          <p:nvPr/>
-        </p:nvSpPr>
-        <p:spPr>
-          <a:xfrm rot="486238">
-            <a:off x="6465242" y="2536825"/>
-            <a:ext cx="862336" cy="862336"/>
-          </a:xfrm>
-          <a:prstGeom prst="star5">
-            <a:avLst/>
-          </a:prstGeom>
-          <a:solidFill>
-            <a:srgbClr val="246B53"/>
-          </a:solidFill>
-          <a:ln>
-            <a:noFill/>
-          </a:ln>
-        </p:spPr>
-        <p:txBody>
-          <a:bodyPr rtlCol="0" anchor="ctr"/>
-          <a:lstStyle/>
-          <a:p>
-            <a:pPr algn="ctr"/>
-          </a:p>
-        </p:txBody>
-      </p:sp>
-      <p:sp>
-        <p:nvSpPr>
-          <p:cNvPr id="9" name="장식"/>
-          <p:cNvSpPr/>
-          <p:nvPr/>
-        </p:nvSpPr>
-        <p:spPr>
-          <a:xfrm rot="21114457">
-            <a:off x="6427123" y="2423818"/>
-            <a:ext cx="852890" cy="852890"/>
-          </a:xfrm>
-          <a:prstGeom prst="star5">
-            <a:avLst/>
-          </a:prstGeom>
-          <a:solidFill>
-            <a:srgbClr val="D0F1E6"/>
-          </a:solidFill>
-          <a:ln>
-            <a:noFill/>
-          </a:ln>
-        </p:spPr>
-        <p:txBody>
-          <a:bodyPr rtlCol="0" anchor="ctr"/>
-          <a:lstStyle/>
-          <a:p>
-            <a:pPr algn="ctr"/>
-          </a:p>
-        </p:txBody>
-      </p:sp>
-      <p:sp>
-        <p:nvSpPr>
-          <p:cNvPr id="10" name="장식"/>
-          <p:cNvSpPr/>
-          <p:nvPr/>
-        </p:nvSpPr>
-        <p:spPr>
-          <a:xfrm rot="21340827">
-            <a:off x="6175236" y="1296230"/>
-            <a:ext cx="435134" cy="435134"/>
-          </a:xfrm>
-          <a:prstGeom prst="star5">
-            <a:avLst/>
-          </a:prstGeom>
-          <a:solidFill>
-            <a:srgbClr val="913B83"/>
-          </a:solidFill>
-          <a:ln>
-            <a:noFill/>
-          </a:ln>
-        </p:spPr>
-        <p:txBody>
-          <a:bodyPr rtlCol="0" anchor="ctr"/>
-          <a:lstStyle/>
-          <a:p>
-            <a:pPr algn="ctr"/>
-          </a:p>
-        </p:txBody>
-      </p:sp>
+        </p:spPr>
+      </p:pic>
       <p:sp>
         <p:nvSpPr>
           <p:cNvPr id="2" name="Title 1"/>
@@ -3546,8 +3330,8 @@
         </p:nvSpPr>
         <p:spPr>
           <a:xfrm>
-            <a:off x="480060" y="2057400"/>
-            <a:ext cx="3771900" cy="1463040"/>
+            <a:off x="685800" y="960120"/>
+            <a:ext cx="5486400" cy="1463040"/>
           </a:xfrm>
         </p:spPr>
         <p:txBody>
@@ -3567,21 +3351,21 @@
                   <a:srgbClr val="143D30"/>
                 </a:solidFill>
               </a:rPr>
-              <a:t>작은 빛이 되어 주는 안부</a:t>
-            </a:r>
-          </a:p>
-        </p:txBody>
-      </p:sp>
-      <p:sp>
-        <p:nvSpPr>
-          <p:cNvPr id="11" name="한 줄 문구"/>
+              <a:t>동료에게 고맙다고 말해 본 적 있나요</a:t>
+            </a:r>
+          </a:p>
+        </p:txBody>
+      </p:sp>
+      <p:sp>
+        <p:nvSpPr>
+          <p:cNvPr id="4" name="한 줄 문구"/>
           <p:cNvSpPr txBox="1"/>
           <p:nvPr/>
         </p:nvSpPr>
         <p:spPr>
           <a:xfrm>
-            <a:off x="480060" y="3611880"/>
-            <a:ext cx="3429000" cy="822960"/>
+            <a:off x="685800" y="2560320"/>
+            <a:ext cx="5486400" cy="822960"/>
           </a:xfrm>
           <a:prstGeom prst="rect">
             <a:avLst/>
@@ -3612,14 +3396,14 @@
       </p:sp>
       <p:sp>
         <p:nvSpPr>
-          <p:cNvPr id="12" name="안내 문구"/>
+          <p:cNvPr id="5" name="안내 문구"/>
           <p:cNvSpPr txBox="1"/>
           <p:nvPr/>
         </p:nvSpPr>
         <p:spPr>
           <a:xfrm>
-            <a:off x="480060" y="4480560"/>
-            <a:ext cx="3429000" cy="914400"/>
+            <a:off x="685800" y="3429000"/>
+            <a:ext cx="5486400" cy="914400"/>
           </a:xfrm>
           <a:prstGeom prst="rect">
             <a:avLst/>
@@ -3734,180 +3518,6 @@
       </p:sp>
       <p:sp>
         <p:nvSpPr>
-          <p:cNvPr id="5" name="장식"/>
-          <p:cNvSpPr/>
-          <p:nvPr/>
-        </p:nvSpPr>
-        <p:spPr>
-          <a:xfrm rot="47073">
-            <a:off x="6204670" y="657714"/>
-            <a:ext cx="339662" cy="339662"/>
-          </a:xfrm>
-          <a:prstGeom prst="star5">
-            <a:avLst/>
-          </a:prstGeom>
-          <a:solidFill>
-            <a:srgbClr val="246B53"/>
-          </a:solidFill>
-          <a:ln>
-            <a:noFill/>
-          </a:ln>
-        </p:spPr>
-        <p:txBody>
-          <a:bodyPr rtlCol="0" anchor="ctr"/>
-          <a:lstStyle/>
-          <a:p>
-            <a:pPr algn="ctr"/>
-          </a:p>
-        </p:txBody>
-      </p:sp>
-      <p:sp>
-        <p:nvSpPr>
-          <p:cNvPr id="6" name="장식"/>
-          <p:cNvSpPr/>
-          <p:nvPr/>
-        </p:nvSpPr>
-        <p:spPr>
-          <a:xfrm rot="616000">
-            <a:off x="6412802" y="343890"/>
-            <a:ext cx="145122" cy="145122"/>
-          </a:xfrm>
-          <a:prstGeom prst="star5">
-            <a:avLst/>
-          </a:prstGeom>
-          <a:solidFill>
-            <a:srgbClr val="D0F1E6"/>
-          </a:solidFill>
-          <a:ln>
-            <a:noFill/>
-          </a:ln>
-        </p:spPr>
-        <p:txBody>
-          <a:bodyPr rtlCol="0" anchor="ctr"/>
-          <a:lstStyle/>
-          <a:p>
-            <a:pPr algn="ctr"/>
-          </a:p>
-        </p:txBody>
-      </p:sp>
-      <p:sp>
-        <p:nvSpPr>
-          <p:cNvPr id="7" name="장식"/>
-          <p:cNvSpPr/>
-          <p:nvPr/>
-        </p:nvSpPr>
-        <p:spPr>
-          <a:xfrm rot="291727">
-            <a:off x="5557586" y="851234"/>
-            <a:ext cx="259566" cy="259566"/>
-          </a:xfrm>
-          <a:prstGeom prst="star5">
-            <a:avLst/>
-          </a:prstGeom>
-          <a:solidFill>
-            <a:srgbClr val="913B83"/>
-          </a:solidFill>
-          <a:ln>
-            <a:noFill/>
-          </a:ln>
-        </p:spPr>
-        <p:txBody>
-          <a:bodyPr rtlCol="0" anchor="ctr"/>
-          <a:lstStyle/>
-          <a:p>
-            <a:pPr algn="ctr"/>
-          </a:p>
-        </p:txBody>
-      </p:sp>
-      <p:sp>
-        <p:nvSpPr>
-          <p:cNvPr id="8" name="장식"/>
-          <p:cNvSpPr/>
-          <p:nvPr/>
-        </p:nvSpPr>
-        <p:spPr>
-          <a:xfrm rot="486238">
-            <a:off x="6331138" y="1088349"/>
-            <a:ext cx="301133" cy="301133"/>
-          </a:xfrm>
-          <a:prstGeom prst="star5">
-            <a:avLst/>
-          </a:prstGeom>
-          <a:solidFill>
-            <a:srgbClr val="246B53"/>
-          </a:solidFill>
-          <a:ln>
-            <a:noFill/>
-          </a:ln>
-        </p:spPr>
-        <p:txBody>
-          <a:bodyPr rtlCol="0" anchor="ctr"/>
-          <a:lstStyle/>
-          <a:p>
-            <a:pPr algn="ctr"/>
-          </a:p>
-        </p:txBody>
-      </p:sp>
-      <p:sp>
-        <p:nvSpPr>
-          <p:cNvPr id="9" name="장식"/>
-          <p:cNvSpPr/>
-          <p:nvPr/>
-        </p:nvSpPr>
-        <p:spPr>
-          <a:xfrm rot="21114457">
-            <a:off x="6317826" y="1048887"/>
-            <a:ext cx="297834" cy="297834"/>
-          </a:xfrm>
-          <a:prstGeom prst="star5">
-            <a:avLst/>
-          </a:prstGeom>
-          <a:solidFill>
-            <a:srgbClr val="D0F1E6"/>
-          </a:solidFill>
-          <a:ln>
-            <a:noFill/>
-          </a:ln>
-        </p:spPr>
-        <p:txBody>
-          <a:bodyPr rtlCol="0" anchor="ctr"/>
-          <a:lstStyle/>
-          <a:p>
-            <a:pPr algn="ctr"/>
-          </a:p>
-        </p:txBody>
-      </p:sp>
-      <p:sp>
-        <p:nvSpPr>
-          <p:cNvPr id="10" name="장식"/>
-          <p:cNvSpPr/>
-          <p:nvPr/>
-        </p:nvSpPr>
-        <p:spPr>
-          <a:xfrm rot="21340827">
-            <a:off x="6229866" y="655126"/>
-            <a:ext cx="151951" cy="151951"/>
-          </a:xfrm>
-          <a:prstGeom prst="star5">
-            <a:avLst/>
-          </a:prstGeom>
-          <a:solidFill>
-            <a:srgbClr val="913B83"/>
-          </a:solidFill>
-          <a:ln>
-            <a:noFill/>
-          </a:ln>
-        </p:spPr>
-        <p:txBody>
-          <a:bodyPr rtlCol="0" anchor="ctr"/>
-          <a:lstStyle/>
-          <a:p>
-            <a:pPr algn="ctr"/>
-          </a:p>
-        </p:txBody>
-      </p:sp>
-      <p:sp>
-        <p:nvSpPr>
           <p:cNvPr id="2" name="Title 1"/>
           <p:cNvSpPr>
             <a:spLocks noGrp="1"/>
@@ -3946,7 +3556,7 @@
       </p:sp>
       <p:sp>
         <p:nvSpPr>
-          <p:cNvPr id="11" name="번호"/>
+          <p:cNvPr id="5" name="번호"/>
           <p:cNvSpPr txBox="1"/>
           <p:nvPr/>
         </p:nvSpPr>
@@ -3984,7 +3594,7 @@
       </p:sp>
       <p:sp>
         <p:nvSpPr>
-          <p:cNvPr id="12" name="본문"/>
+          <p:cNvPr id="6" name="본문"/>
           <p:cNvSpPr txBox="1"/>
           <p:nvPr/>
         </p:nvSpPr>
@@ -4022,7 +3632,7 @@
       </p:sp>
       <p:sp>
         <p:nvSpPr>
-          <p:cNvPr id="13" name="쪽 번호"/>
+          <p:cNvPr id="7" name="쪽 번호"/>
           <p:cNvSpPr txBox="1"/>
           <p:nvPr/>
         </p:nvSpPr>
@@ -4144,180 +3754,6 @@
       </p:sp>
       <p:sp>
         <p:nvSpPr>
-          <p:cNvPr id="5" name="장식"/>
-          <p:cNvSpPr/>
-          <p:nvPr/>
-        </p:nvSpPr>
-        <p:spPr>
-          <a:xfrm rot="47073">
-            <a:off x="6204670" y="657714"/>
-            <a:ext cx="339662" cy="339662"/>
-          </a:xfrm>
-          <a:prstGeom prst="star5">
-            <a:avLst/>
-          </a:prstGeom>
-          <a:solidFill>
-            <a:srgbClr val="246B53"/>
-          </a:solidFill>
-          <a:ln>
-            <a:noFill/>
-          </a:ln>
-        </p:spPr>
-        <p:txBody>
-          <a:bodyPr rtlCol="0" anchor="ctr"/>
-          <a:lstStyle/>
-          <a:p>
-            <a:pPr algn="ctr"/>
-          </a:p>
-        </p:txBody>
-      </p:sp>
-      <p:sp>
-        <p:nvSpPr>
-          <p:cNvPr id="6" name="장식"/>
-          <p:cNvSpPr/>
-          <p:nvPr/>
-        </p:nvSpPr>
-        <p:spPr>
-          <a:xfrm rot="616000">
-            <a:off x="6412802" y="343890"/>
-            <a:ext cx="145122" cy="145122"/>
-          </a:xfrm>
-          <a:prstGeom prst="star5">
-            <a:avLst/>
-          </a:prstGeom>
-          <a:solidFill>
-            <a:srgbClr val="D0F1E6"/>
-          </a:solidFill>
-          <a:ln>
-            <a:noFill/>
-          </a:ln>
-        </p:spPr>
-        <p:txBody>
-          <a:bodyPr rtlCol="0" anchor="ctr"/>
-          <a:lstStyle/>
-          <a:p>
-            <a:pPr algn="ctr"/>
-          </a:p>
-        </p:txBody>
-      </p:sp>
-      <p:sp>
-        <p:nvSpPr>
-          <p:cNvPr id="7" name="장식"/>
-          <p:cNvSpPr/>
-          <p:nvPr/>
-        </p:nvSpPr>
-        <p:spPr>
-          <a:xfrm rot="291727">
-            <a:off x="5557586" y="851234"/>
-            <a:ext cx="259566" cy="259566"/>
-          </a:xfrm>
-          <a:prstGeom prst="star5">
-            <a:avLst/>
-          </a:prstGeom>
-          <a:solidFill>
-            <a:srgbClr val="913B83"/>
-          </a:solidFill>
-          <a:ln>
-            <a:noFill/>
-          </a:ln>
-        </p:spPr>
-        <p:txBody>
-          <a:bodyPr rtlCol="0" anchor="ctr"/>
-          <a:lstStyle/>
-          <a:p>
-            <a:pPr algn="ctr"/>
-          </a:p>
-        </p:txBody>
-      </p:sp>
-      <p:sp>
-        <p:nvSpPr>
-          <p:cNvPr id="8" name="장식"/>
-          <p:cNvSpPr/>
-          <p:nvPr/>
-        </p:nvSpPr>
-        <p:spPr>
-          <a:xfrm rot="486238">
-            <a:off x="6331138" y="1088349"/>
-            <a:ext cx="301133" cy="301133"/>
-          </a:xfrm>
-          <a:prstGeom prst="star5">
-            <a:avLst/>
-          </a:prstGeom>
-          <a:solidFill>
-            <a:srgbClr val="246B53"/>
-          </a:solidFill>
-          <a:ln>
-            <a:noFill/>
-          </a:ln>
-        </p:spPr>
-        <p:txBody>
-          <a:bodyPr rtlCol="0" anchor="ctr"/>
-          <a:lstStyle/>
-          <a:p>
-            <a:pPr algn="ctr"/>
-          </a:p>
-        </p:txBody>
-      </p:sp>
-      <p:sp>
-        <p:nvSpPr>
-          <p:cNvPr id="9" name="장식"/>
-          <p:cNvSpPr/>
-          <p:nvPr/>
-        </p:nvSpPr>
-        <p:spPr>
-          <a:xfrm rot="21114457">
-            <a:off x="6317826" y="1048887"/>
-            <a:ext cx="297834" cy="297834"/>
-          </a:xfrm>
-          <a:prstGeom prst="star5">
-            <a:avLst/>
-          </a:prstGeom>
-          <a:solidFill>
-            <a:srgbClr val="D0F1E6"/>
-          </a:solidFill>
-          <a:ln>
-            <a:noFill/>
-          </a:ln>
-        </p:spPr>
-        <p:txBody>
-          <a:bodyPr rtlCol="0" anchor="ctr"/>
-          <a:lstStyle/>
-          <a:p>
-            <a:pPr algn="ctr"/>
-          </a:p>
-        </p:txBody>
-      </p:sp>
-      <p:sp>
-        <p:nvSpPr>
-          <p:cNvPr id="10" name="장식"/>
-          <p:cNvSpPr/>
-          <p:nvPr/>
-        </p:nvSpPr>
-        <p:spPr>
-          <a:xfrm rot="21340827">
-            <a:off x="6229866" y="655126"/>
-            <a:ext cx="151951" cy="151951"/>
-          </a:xfrm>
-          <a:prstGeom prst="star5">
-            <a:avLst/>
-          </a:prstGeom>
-          <a:solidFill>
-            <a:srgbClr val="913B83"/>
-          </a:solidFill>
-          <a:ln>
-            <a:noFill/>
-          </a:ln>
-        </p:spPr>
-        <p:txBody>
-          <a:bodyPr rtlCol="0" anchor="ctr"/>
-          <a:lstStyle/>
-          <a:p>
-            <a:pPr algn="ctr"/>
-          </a:p>
-        </p:txBody>
-      </p:sp>
-      <p:sp>
-        <p:nvSpPr>
           <p:cNvPr id="2" name="Title 1"/>
           <p:cNvSpPr>
             <a:spLocks noGrp="1"/>
@@ -4356,7 +3792,7 @@
       </p:sp>
       <p:sp>
         <p:nvSpPr>
-          <p:cNvPr id="11" name="번호"/>
+          <p:cNvPr id="5" name="번호"/>
           <p:cNvSpPr txBox="1"/>
           <p:nvPr/>
         </p:nvSpPr>
@@ -4394,7 +3830,7 @@
       </p:sp>
       <p:sp>
         <p:nvSpPr>
-          <p:cNvPr id="12" name="본문"/>
+          <p:cNvPr id="6" name="본문"/>
           <p:cNvSpPr txBox="1"/>
           <p:nvPr/>
         </p:nvSpPr>
@@ -4432,7 +3868,7 @@
       </p:sp>
       <p:sp>
         <p:nvSpPr>
-          <p:cNvPr id="13" name="쪽 번호"/>
+          <p:cNvPr id="7" name="쪽 번호"/>
           <p:cNvSpPr txBox="1"/>
           <p:nvPr/>
         </p:nvSpPr>
@@ -4554,180 +3990,6 @@
       </p:sp>
       <p:sp>
         <p:nvSpPr>
-          <p:cNvPr id="5" name="장식"/>
-          <p:cNvSpPr/>
-          <p:nvPr/>
-        </p:nvSpPr>
-        <p:spPr>
-          <a:xfrm rot="47073">
-            <a:off x="6204670" y="657714"/>
-            <a:ext cx="339662" cy="339662"/>
-          </a:xfrm>
-          <a:prstGeom prst="star5">
-            <a:avLst/>
-          </a:prstGeom>
-          <a:solidFill>
-            <a:srgbClr val="246B53"/>
-          </a:solidFill>
-          <a:ln>
-            <a:noFill/>
-          </a:ln>
-        </p:spPr>
-        <p:txBody>
-          <a:bodyPr rtlCol="0" anchor="ctr"/>
-          <a:lstStyle/>
-          <a:p>
-            <a:pPr algn="ctr"/>
-          </a:p>
-        </p:txBody>
-      </p:sp>
-      <p:sp>
-        <p:nvSpPr>
-          <p:cNvPr id="6" name="장식"/>
-          <p:cNvSpPr/>
-          <p:nvPr/>
-        </p:nvSpPr>
-        <p:spPr>
-          <a:xfrm rot="616000">
-            <a:off x="6412802" y="343890"/>
-            <a:ext cx="145122" cy="145122"/>
-          </a:xfrm>
-          <a:prstGeom prst="star5">
-            <a:avLst/>
-          </a:prstGeom>
-          <a:solidFill>
-            <a:srgbClr val="D0F1E6"/>
-          </a:solidFill>
-          <a:ln>
-            <a:noFill/>
-          </a:ln>
-        </p:spPr>
-        <p:txBody>
-          <a:bodyPr rtlCol="0" anchor="ctr"/>
-          <a:lstStyle/>
-          <a:p>
-            <a:pPr algn="ctr"/>
-          </a:p>
-        </p:txBody>
-      </p:sp>
-      <p:sp>
-        <p:nvSpPr>
-          <p:cNvPr id="7" name="장식"/>
-          <p:cNvSpPr/>
-          <p:nvPr/>
-        </p:nvSpPr>
-        <p:spPr>
-          <a:xfrm rot="291727">
-            <a:off x="5557586" y="851234"/>
-            <a:ext cx="259566" cy="259566"/>
-          </a:xfrm>
-          <a:prstGeom prst="star5">
-            <a:avLst/>
-          </a:prstGeom>
-          <a:solidFill>
-            <a:srgbClr val="913B83"/>
-          </a:solidFill>
-          <a:ln>
-            <a:noFill/>
-          </a:ln>
-        </p:spPr>
-        <p:txBody>
-          <a:bodyPr rtlCol="0" anchor="ctr"/>
-          <a:lstStyle/>
-          <a:p>
-            <a:pPr algn="ctr"/>
-          </a:p>
-        </p:txBody>
-      </p:sp>
-      <p:sp>
-        <p:nvSpPr>
-          <p:cNvPr id="8" name="장식"/>
-          <p:cNvSpPr/>
-          <p:nvPr/>
-        </p:nvSpPr>
-        <p:spPr>
-          <a:xfrm rot="486238">
-            <a:off x="6331138" y="1088349"/>
-            <a:ext cx="301133" cy="301133"/>
-          </a:xfrm>
-          <a:prstGeom prst="star5">
-            <a:avLst/>
-          </a:prstGeom>
-          <a:solidFill>
-            <a:srgbClr val="246B53"/>
-          </a:solidFill>
-          <a:ln>
-            <a:noFill/>
-          </a:ln>
-        </p:spPr>
-        <p:txBody>
-          <a:bodyPr rtlCol="0" anchor="ctr"/>
-          <a:lstStyle/>
-          <a:p>
-            <a:pPr algn="ctr"/>
-          </a:p>
-        </p:txBody>
-      </p:sp>
-      <p:sp>
-        <p:nvSpPr>
-          <p:cNvPr id="9" name="장식"/>
-          <p:cNvSpPr/>
-          <p:nvPr/>
-        </p:nvSpPr>
-        <p:spPr>
-          <a:xfrm rot="21114457">
-            <a:off x="6317826" y="1048887"/>
-            <a:ext cx="297834" cy="297834"/>
-          </a:xfrm>
-          <a:prstGeom prst="star5">
-            <a:avLst/>
-          </a:prstGeom>
-          <a:solidFill>
-            <a:srgbClr val="D0F1E6"/>
-          </a:solidFill>
-          <a:ln>
-            <a:noFill/>
-          </a:ln>
-        </p:spPr>
-        <p:txBody>
-          <a:bodyPr rtlCol="0" anchor="ctr"/>
-          <a:lstStyle/>
-          <a:p>
-            <a:pPr algn="ctr"/>
-          </a:p>
-        </p:txBody>
-      </p:sp>
-      <p:sp>
-        <p:nvSpPr>
-          <p:cNvPr id="10" name="장식"/>
-          <p:cNvSpPr/>
-          <p:nvPr/>
-        </p:nvSpPr>
-        <p:spPr>
-          <a:xfrm rot="21340827">
-            <a:off x="6229866" y="655126"/>
-            <a:ext cx="151951" cy="151951"/>
-          </a:xfrm>
-          <a:prstGeom prst="star5">
-            <a:avLst/>
-          </a:prstGeom>
-          <a:solidFill>
-            <a:srgbClr val="913B83"/>
-          </a:solidFill>
-          <a:ln>
-            <a:noFill/>
-          </a:ln>
-        </p:spPr>
-        <p:txBody>
-          <a:bodyPr rtlCol="0" anchor="ctr"/>
-          <a:lstStyle/>
-          <a:p>
-            <a:pPr algn="ctr"/>
-          </a:p>
-        </p:txBody>
-      </p:sp>
-      <p:sp>
-        <p:nvSpPr>
           <p:cNvPr id="2" name="Title 1"/>
           <p:cNvSpPr>
             <a:spLocks noGrp="1"/>
@@ -4759,14 +4021,14 @@
                   <a:srgbClr val="143D30"/>
                 </a:solidFill>
               </a:rPr>
-              <a:t>수고했다는 인사 전하기</a:t>
-            </a:r>
-          </a:p>
-        </p:txBody>
-      </p:sp>
-      <p:sp>
-        <p:nvSpPr>
-          <p:cNvPr id="11" name="번호"/>
+              <a:t>퇴근한 사람에게 한마디</a:t>
+            </a:r>
+          </a:p>
+        </p:txBody>
+      </p:sp>
+      <p:sp>
+        <p:nvSpPr>
+          <p:cNvPr id="5" name="번호"/>
           <p:cNvSpPr txBox="1"/>
           <p:nvPr/>
         </p:nvSpPr>
@@ -4804,7 +4066,7 @@
       </p:sp>
       <p:sp>
         <p:nvSpPr>
-          <p:cNvPr id="12" name="본문"/>
+          <p:cNvPr id="6" name="본문"/>
           <p:cNvSpPr txBox="1"/>
           <p:nvPr/>
         </p:nvSpPr>
@@ -4835,14 +4097,14 @@
                   <a:srgbClr val="2B2B2B"/>
                 </a:solidFill>
               </a:rPr>
-              <a:t>하루를 마치고 돌아온 사람에게 따뜻한 한마디를.</a:t>
-            </a:r>
-          </a:p>
-        </p:txBody>
-      </p:sp>
-      <p:sp>
-        <p:nvSpPr>
-          <p:cNvPr id="13" name="쪽 번호"/>
+              <a:t>‘오늘도 고생했어’ 한마디면 충분해요.</a:t>
+            </a:r>
+          </a:p>
+        </p:txBody>
+      </p:sp>
+      <p:sp>
+        <p:nvSpPr>
+          <p:cNvPr id="7" name="쪽 번호"/>
           <p:cNvSpPr txBox="1"/>
           <p:nvPr/>
         </p:nvSpPr>
@@ -4964,180 +4226,6 @@
       </p:sp>
       <p:sp>
         <p:nvSpPr>
-          <p:cNvPr id="5" name="장식"/>
-          <p:cNvSpPr/>
-          <p:nvPr/>
-        </p:nvSpPr>
-        <p:spPr>
-          <a:xfrm rot="47073">
-            <a:off x="6204670" y="657714"/>
-            <a:ext cx="339662" cy="339662"/>
-          </a:xfrm>
-          <a:prstGeom prst="star5">
-            <a:avLst/>
-          </a:prstGeom>
-          <a:solidFill>
-            <a:srgbClr val="246B53"/>
-          </a:solidFill>
-          <a:ln>
-            <a:noFill/>
-          </a:ln>
-        </p:spPr>
-        <p:txBody>
-          <a:bodyPr rtlCol="0" anchor="ctr"/>
-          <a:lstStyle/>
-          <a:p>
-            <a:pPr algn="ctr"/>
-          </a:p>
-        </p:txBody>
-      </p:sp>
-      <p:sp>
-        <p:nvSpPr>
-          <p:cNvPr id="6" name="장식"/>
-          <p:cNvSpPr/>
-          <p:nvPr/>
-        </p:nvSpPr>
-        <p:spPr>
-          <a:xfrm rot="616000">
-            <a:off x="6412802" y="343890"/>
-            <a:ext cx="145122" cy="145122"/>
-          </a:xfrm>
-          <a:prstGeom prst="star5">
-            <a:avLst/>
-          </a:prstGeom>
-          <a:solidFill>
-            <a:srgbClr val="D0F1E6"/>
-          </a:solidFill>
-          <a:ln>
-            <a:noFill/>
-          </a:ln>
-        </p:spPr>
-        <p:txBody>
-          <a:bodyPr rtlCol="0" anchor="ctr"/>
-          <a:lstStyle/>
-          <a:p>
-            <a:pPr algn="ctr"/>
-          </a:p>
-        </p:txBody>
-      </p:sp>
-      <p:sp>
-        <p:nvSpPr>
-          <p:cNvPr id="7" name="장식"/>
-          <p:cNvSpPr/>
-          <p:nvPr/>
-        </p:nvSpPr>
-        <p:spPr>
-          <a:xfrm rot="291727">
-            <a:off x="5557586" y="851234"/>
-            <a:ext cx="259566" cy="259566"/>
-          </a:xfrm>
-          <a:prstGeom prst="star5">
-            <a:avLst/>
-          </a:prstGeom>
-          <a:solidFill>
-            <a:srgbClr val="913B83"/>
-          </a:solidFill>
-          <a:ln>
-            <a:noFill/>
-          </a:ln>
-        </p:spPr>
-        <p:txBody>
-          <a:bodyPr rtlCol="0" anchor="ctr"/>
-          <a:lstStyle/>
-          <a:p>
-            <a:pPr algn="ctr"/>
-          </a:p>
-        </p:txBody>
-      </p:sp>
-      <p:sp>
-        <p:nvSpPr>
-          <p:cNvPr id="8" name="장식"/>
-          <p:cNvSpPr/>
-          <p:nvPr/>
-        </p:nvSpPr>
-        <p:spPr>
-          <a:xfrm rot="486238">
-            <a:off x="6331138" y="1088349"/>
-            <a:ext cx="301133" cy="301133"/>
-          </a:xfrm>
-          <a:prstGeom prst="star5">
-            <a:avLst/>
-          </a:prstGeom>
-          <a:solidFill>
-            <a:srgbClr val="246B53"/>
-          </a:solidFill>
-          <a:ln>
-            <a:noFill/>
-          </a:ln>
-        </p:spPr>
-        <p:txBody>
-          <a:bodyPr rtlCol="0" anchor="ctr"/>
-          <a:lstStyle/>
-          <a:p>
-            <a:pPr algn="ctr"/>
-          </a:p>
-        </p:txBody>
-      </p:sp>
-      <p:sp>
-        <p:nvSpPr>
-          <p:cNvPr id="9" name="장식"/>
-          <p:cNvSpPr/>
-          <p:nvPr/>
-        </p:nvSpPr>
-        <p:spPr>
-          <a:xfrm rot="21114457">
-            <a:off x="6317826" y="1048887"/>
-            <a:ext cx="297834" cy="297834"/>
-          </a:xfrm>
-          <a:prstGeom prst="star5">
-            <a:avLst/>
-          </a:prstGeom>
-          <a:solidFill>
-            <a:srgbClr val="D0F1E6"/>
-          </a:solidFill>
-          <a:ln>
-            <a:noFill/>
-          </a:ln>
-        </p:spPr>
-        <p:txBody>
-          <a:bodyPr rtlCol="0" anchor="ctr"/>
-          <a:lstStyle/>
-          <a:p>
-            <a:pPr algn="ctr"/>
-          </a:p>
-        </p:txBody>
-      </p:sp>
-      <p:sp>
-        <p:nvSpPr>
-          <p:cNvPr id="10" name="장식"/>
-          <p:cNvSpPr/>
-          <p:nvPr/>
-        </p:nvSpPr>
-        <p:spPr>
-          <a:xfrm rot="21340827">
-            <a:off x="6229866" y="655126"/>
-            <a:ext cx="151951" cy="151951"/>
-          </a:xfrm>
-          <a:prstGeom prst="star5">
-            <a:avLst/>
-          </a:prstGeom>
-          <a:solidFill>
-            <a:srgbClr val="913B83"/>
-          </a:solidFill>
-          <a:ln>
-            <a:noFill/>
-          </a:ln>
-        </p:spPr>
-        <p:txBody>
-          <a:bodyPr rtlCol="0" anchor="ctr"/>
-          <a:lstStyle/>
-          <a:p>
-            <a:pPr algn="ctr"/>
-          </a:p>
-        </p:txBody>
-      </p:sp>
-      <p:sp>
-        <p:nvSpPr>
           <p:cNvPr id="2" name="Title 1"/>
           <p:cNvSpPr>
             <a:spLocks noGrp="1"/>
@@ -5176,7 +4264,7 @@
       </p:sp>
       <p:sp>
         <p:nvSpPr>
-          <p:cNvPr id="11" name="번호"/>
+          <p:cNvPr id="5" name="번호"/>
           <p:cNvSpPr txBox="1"/>
           <p:nvPr/>
         </p:nvSpPr>
@@ -5214,7 +4302,7 @@
       </p:sp>
       <p:sp>
         <p:nvSpPr>
-          <p:cNvPr id="12" name="본문"/>
+          <p:cNvPr id="6" name="본문"/>
           <p:cNvSpPr txBox="1"/>
           <p:nvPr/>
         </p:nvSpPr>
@@ -5245,14 +4333,14 @@
                   <a:srgbClr val="2B2B2B"/>
                 </a:solidFill>
               </a:rPr>
-              <a:t>오늘 감사했던 일 세 가지를 적어 보세요.</a:t>
-            </a:r>
-          </a:p>
-        </p:txBody>
-      </p:sp>
-      <p:sp>
-        <p:nvSpPr>
-          <p:cNvPr id="13" name="쪽 번호"/>
+              <a:t>오늘 고마웠던 일 세 가지를 적어 보세요.</a:t>
+            </a:r>
+          </a:p>
+        </p:txBody>
+      </p:sp>
+      <p:sp>
+        <p:nvSpPr>
+          <p:cNvPr id="7" name="쪽 번호"/>
           <p:cNvSpPr txBox="1"/>
           <p:nvPr/>
         </p:nvSpPr>
@@ -5374,180 +4462,6 @@
       </p:sp>
       <p:sp>
         <p:nvSpPr>
-          <p:cNvPr id="5" name="장식"/>
-          <p:cNvSpPr/>
-          <p:nvPr/>
-        </p:nvSpPr>
-        <p:spPr>
-          <a:xfrm rot="47073">
-            <a:off x="6204670" y="657714"/>
-            <a:ext cx="339662" cy="339662"/>
-          </a:xfrm>
-          <a:prstGeom prst="star5">
-            <a:avLst/>
-          </a:prstGeom>
-          <a:solidFill>
-            <a:srgbClr val="246B53"/>
-          </a:solidFill>
-          <a:ln>
-            <a:noFill/>
-          </a:ln>
-        </p:spPr>
-        <p:txBody>
-          <a:bodyPr rtlCol="0" anchor="ctr"/>
-          <a:lstStyle/>
-          <a:p>
-            <a:pPr algn="ctr"/>
-          </a:p>
-        </p:txBody>
-      </p:sp>
-      <p:sp>
-        <p:nvSpPr>
-          <p:cNvPr id="6" name="장식"/>
-          <p:cNvSpPr/>
-          <p:nvPr/>
-        </p:nvSpPr>
-        <p:spPr>
-          <a:xfrm rot="616000">
-            <a:off x="6412802" y="343890"/>
-            <a:ext cx="145122" cy="145122"/>
-          </a:xfrm>
-          <a:prstGeom prst="star5">
-            <a:avLst/>
-          </a:prstGeom>
-          <a:solidFill>
-            <a:srgbClr val="D0F1E6"/>
-          </a:solidFill>
-          <a:ln>
-            <a:noFill/>
-          </a:ln>
-        </p:spPr>
-        <p:txBody>
-          <a:bodyPr rtlCol="0" anchor="ctr"/>
-          <a:lstStyle/>
-          <a:p>
-            <a:pPr algn="ctr"/>
-          </a:p>
-        </p:txBody>
-      </p:sp>
-      <p:sp>
-        <p:nvSpPr>
-          <p:cNvPr id="7" name="장식"/>
-          <p:cNvSpPr/>
-          <p:nvPr/>
-        </p:nvSpPr>
-        <p:spPr>
-          <a:xfrm rot="291727">
-            <a:off x="5557586" y="851234"/>
-            <a:ext cx="259566" cy="259566"/>
-          </a:xfrm>
-          <a:prstGeom prst="star5">
-            <a:avLst/>
-          </a:prstGeom>
-          <a:solidFill>
-            <a:srgbClr val="913B83"/>
-          </a:solidFill>
-          <a:ln>
-            <a:noFill/>
-          </a:ln>
-        </p:spPr>
-        <p:txBody>
-          <a:bodyPr rtlCol="0" anchor="ctr"/>
-          <a:lstStyle/>
-          <a:p>
-            <a:pPr algn="ctr"/>
-          </a:p>
-        </p:txBody>
-      </p:sp>
-      <p:sp>
-        <p:nvSpPr>
-          <p:cNvPr id="8" name="장식"/>
-          <p:cNvSpPr/>
-          <p:nvPr/>
-        </p:nvSpPr>
-        <p:spPr>
-          <a:xfrm rot="486238">
-            <a:off x="6331138" y="1088349"/>
-            <a:ext cx="301133" cy="301133"/>
-          </a:xfrm>
-          <a:prstGeom prst="star5">
-            <a:avLst/>
-          </a:prstGeom>
-          <a:solidFill>
-            <a:srgbClr val="246B53"/>
-          </a:solidFill>
-          <a:ln>
-            <a:noFill/>
-          </a:ln>
-        </p:spPr>
-        <p:txBody>
-          <a:bodyPr rtlCol="0" anchor="ctr"/>
-          <a:lstStyle/>
-          <a:p>
-            <a:pPr algn="ctr"/>
-          </a:p>
-        </p:txBody>
-      </p:sp>
-      <p:sp>
-        <p:nvSpPr>
-          <p:cNvPr id="9" name="장식"/>
-          <p:cNvSpPr/>
-          <p:nvPr/>
-        </p:nvSpPr>
-        <p:spPr>
-          <a:xfrm rot="21114457">
-            <a:off x="6317826" y="1048887"/>
-            <a:ext cx="297834" cy="297834"/>
-          </a:xfrm>
-          <a:prstGeom prst="star5">
-            <a:avLst/>
-          </a:prstGeom>
-          <a:solidFill>
-            <a:srgbClr val="D0F1E6"/>
-          </a:solidFill>
-          <a:ln>
-            <a:noFill/>
-          </a:ln>
-        </p:spPr>
-        <p:txBody>
-          <a:bodyPr rtlCol="0" anchor="ctr"/>
-          <a:lstStyle/>
-          <a:p>
-            <a:pPr algn="ctr"/>
-          </a:p>
-        </p:txBody>
-      </p:sp>
-      <p:sp>
-        <p:nvSpPr>
-          <p:cNvPr id="10" name="장식"/>
-          <p:cNvSpPr/>
-          <p:nvPr/>
-        </p:nvSpPr>
-        <p:spPr>
-          <a:xfrm rot="21340827">
-            <a:off x="6229866" y="655126"/>
-            <a:ext cx="151951" cy="151951"/>
-          </a:xfrm>
-          <a:prstGeom prst="star5">
-            <a:avLst/>
-          </a:prstGeom>
-          <a:solidFill>
-            <a:srgbClr val="913B83"/>
-          </a:solidFill>
-          <a:ln>
-            <a:noFill/>
-          </a:ln>
-        </p:spPr>
-        <p:txBody>
-          <a:bodyPr rtlCol="0" anchor="ctr"/>
-          <a:lstStyle/>
-          <a:p>
-            <a:pPr algn="ctr"/>
-          </a:p>
-        </p:txBody>
-      </p:sp>
-      <p:sp>
-        <p:nvSpPr>
           <p:cNvPr id="2" name="Title 1"/>
           <p:cNvSpPr>
             <a:spLocks noGrp="1"/>
@@ -5579,14 +4493,14 @@
                   <a:srgbClr val="143D30"/>
                 </a:solidFill>
               </a:rPr>
-              <a:t>손편지 한 통 쓰기</a:t>
-            </a:r>
-          </a:p>
-        </p:txBody>
-      </p:sp>
-      <p:sp>
-        <p:nvSpPr>
-          <p:cNvPr id="11" name="번호"/>
+              <a:t>엽서 한 장 쓰기</a:t>
+            </a:r>
+          </a:p>
+        </p:txBody>
+      </p:sp>
+      <p:sp>
+        <p:nvSpPr>
+          <p:cNvPr id="5" name="번호"/>
           <p:cNvSpPr txBox="1"/>
           <p:nvPr/>
         </p:nvSpPr>
@@ -5624,7 +4538,7 @@
       </p:sp>
       <p:sp>
         <p:nvSpPr>
-          <p:cNvPr id="12" name="본문"/>
+          <p:cNvPr id="6" name="본문"/>
           <p:cNvSpPr txBox="1"/>
           <p:nvPr/>
         </p:nvSpPr>
@@ -5655,14 +4569,14 @@
                   <a:srgbClr val="2B2B2B"/>
                 </a:solidFill>
               </a:rPr>
-              <a:t>짧아도 좋아요. 손으로 쓴 마음은 오래 남아요.</a:t>
-            </a:r>
-          </a:p>
-        </p:txBody>
-      </p:sp>
-      <p:sp>
-        <p:nvSpPr>
-          <p:cNvPr id="13" name="쪽 번호"/>
+              <a:t>짧아도 좋아요. 우체통에 넣는 순간 설레요.</a:t>
+            </a:r>
+          </a:p>
+        </p:txBody>
+      </p:sp>
+      <p:sp>
+        <p:nvSpPr>
+          <p:cNvPr id="7" name="쪽 번호"/>
           <p:cNvSpPr txBox="1"/>
           <p:nvPr/>
         </p:nvSpPr>
@@ -5709,14 +4623,6 @@
 <file path=ppt/slides/slide7.xml><?xml version="1.0" encoding="utf-8"?>
 <p:sld xmlns:a="http://schemas.openxmlformats.org/drawingml/2006/main" xmlns:p="http://schemas.openxmlformats.org/presentationml/2006/main" xmlns:r="http://schemas.openxmlformats.org/officeDocument/2006/relationships">
   <p:cSld>
-    <p:bg>
-      <p:bgPr>
-        <a:solidFill>
-          <a:srgbClr val="FFFFFF"/>
-        </a:solidFill>
-        <a:effectLst/>
-      </p:bgPr>
-    </p:bg>
     <p:spTree>
       <p:nvGrpSpPr>
         <p:cNvPr id="1" name=""/>
@@ -5724,238 +4630,30 @@
         <p:nvPr/>
       </p:nvGrpSpPr>
       <p:grpSpPr/>
-      <p:sp>
-        <p:nvSpPr>
-          <p:cNvPr id="3" name="장식"/>
-          <p:cNvSpPr/>
+      <p:pic>
+        <p:nvPicPr>
+          <p:cNvPr id="3" name="표지 그림" descr="news-19.jpg"/>
+          <p:cNvPicPr>
+            <a:picLocks noChangeAspect="1"/>
+          </p:cNvPicPr>
           <p:nvPr/>
-        </p:nvSpPr>
-        <p:spPr>
-          <a:xfrm>
-            <a:off x="3977639" y="-1714500"/>
-            <a:ext cx="7886700" cy="7886700"/>
-          </a:xfrm>
-          <a:prstGeom prst="ellipse">
+        </p:nvPicPr>
+        <p:blipFill>
+          <a:blip r:embed="rId2"/>
+          <a:stretch>
+            <a:fillRect/>
+          </a:stretch>
+        </p:blipFill>
+        <p:spPr>
+          <a:xfrm>
+            <a:off x="0" y="0"/>
+            <a:ext cx="6858000" cy="6858000"/>
+          </a:xfrm>
+          <a:prstGeom prst="rect">
             <a:avLst/>
           </a:prstGeom>
-          <a:solidFill>
-            <a:srgbClr val="D0F1E6"/>
-          </a:solidFill>
-          <a:ln>
-            <a:noFill/>
-          </a:ln>
-        </p:spPr>
-        <p:txBody>
-          <a:bodyPr rtlCol="0" anchor="ctr"/>
-          <a:lstStyle/>
-          <a:p>
-            <a:pPr algn="ctr"/>
-          </a:p>
-        </p:txBody>
-      </p:sp>
-      <p:sp>
-        <p:nvSpPr>
-          <p:cNvPr id="4" name="장식"/>
-          <p:cNvSpPr/>
-          <p:nvPr/>
-        </p:nvSpPr>
-        <p:spPr>
-          <a:xfrm>
-            <a:off x="5349240" y="3977639"/>
-            <a:ext cx="3429000" cy="3429000"/>
-          </a:xfrm>
-          <a:prstGeom prst="ellipse">
-            <a:avLst/>
-          </a:prstGeom>
-          <a:solidFill>
-            <a:srgbClr val="246B53"/>
-          </a:solidFill>
-          <a:ln>
-            <a:noFill/>
-          </a:ln>
-        </p:spPr>
-        <p:txBody>
-          <a:bodyPr rtlCol="0" anchor="ctr"/>
-          <a:lstStyle/>
-          <a:p>
-            <a:pPr algn="ctr"/>
-          </a:p>
-        </p:txBody>
-      </p:sp>
-      <p:sp>
-        <p:nvSpPr>
-          <p:cNvPr id="5" name="장식"/>
-          <p:cNvSpPr/>
-          <p:nvPr/>
-        </p:nvSpPr>
-        <p:spPr>
-          <a:xfrm rot="47073">
-            <a:off x="6103085" y="1303642"/>
-            <a:ext cx="972669" cy="972669"/>
-          </a:xfrm>
-          <a:prstGeom prst="star5">
-            <a:avLst/>
-          </a:prstGeom>
-          <a:solidFill>
-            <a:srgbClr val="246B53"/>
-          </a:solidFill>
-          <a:ln>
-            <a:noFill/>
-          </a:ln>
-        </p:spPr>
-        <p:txBody>
-          <a:bodyPr rtlCol="0" anchor="ctr"/>
-          <a:lstStyle/>
-          <a:p>
-            <a:pPr algn="ctr"/>
-          </a:p>
-        </p:txBody>
-      </p:sp>
-      <p:sp>
-        <p:nvSpPr>
-          <p:cNvPr id="6" name="장식"/>
-          <p:cNvSpPr/>
-          <p:nvPr/>
-        </p:nvSpPr>
-        <p:spPr>
-          <a:xfrm rot="616000">
-            <a:off x="6699100" y="404965"/>
-            <a:ext cx="415579" cy="415579"/>
-          </a:xfrm>
-          <a:prstGeom prst="star5">
-            <a:avLst/>
-          </a:prstGeom>
-          <a:solidFill>
-            <a:srgbClr val="D0F1E6"/>
-          </a:solidFill>
-          <a:ln>
-            <a:noFill/>
-          </a:ln>
-        </p:spPr>
-        <p:txBody>
-          <a:bodyPr rtlCol="0" anchor="ctr"/>
-          <a:lstStyle/>
-          <a:p>
-            <a:pPr algn="ctr"/>
-          </a:p>
-        </p:txBody>
-      </p:sp>
-      <p:sp>
-        <p:nvSpPr>
-          <p:cNvPr id="7" name="장식"/>
-          <p:cNvSpPr/>
-          <p:nvPr/>
-        </p:nvSpPr>
-        <p:spPr>
-          <a:xfrm rot="291727">
-            <a:off x="4250073" y="1857812"/>
-            <a:ext cx="743304" cy="743304"/>
-          </a:xfrm>
-          <a:prstGeom prst="star5">
-            <a:avLst/>
-          </a:prstGeom>
-          <a:solidFill>
-            <a:srgbClr val="913B83"/>
-          </a:solidFill>
-          <a:ln>
-            <a:noFill/>
-          </a:ln>
-        </p:spPr>
-        <p:txBody>
-          <a:bodyPr rtlCol="0" anchor="ctr"/>
-          <a:lstStyle/>
-          <a:p>
-            <a:pPr algn="ctr"/>
-          </a:p>
-        </p:txBody>
-      </p:sp>
-      <p:sp>
-        <p:nvSpPr>
-          <p:cNvPr id="8" name="장식"/>
-          <p:cNvSpPr/>
-          <p:nvPr/>
-        </p:nvSpPr>
-        <p:spPr>
-          <a:xfrm rot="486238">
-            <a:off x="6465242" y="2536825"/>
-            <a:ext cx="862336" cy="862336"/>
-          </a:xfrm>
-          <a:prstGeom prst="star5">
-            <a:avLst/>
-          </a:prstGeom>
-          <a:solidFill>
-            <a:srgbClr val="246B53"/>
-          </a:solidFill>
-          <a:ln>
-            <a:noFill/>
-          </a:ln>
-        </p:spPr>
-        <p:txBody>
-          <a:bodyPr rtlCol="0" anchor="ctr"/>
-          <a:lstStyle/>
-          <a:p>
-            <a:pPr algn="ctr"/>
-          </a:p>
-        </p:txBody>
-      </p:sp>
-      <p:sp>
-        <p:nvSpPr>
-          <p:cNvPr id="9" name="장식"/>
-          <p:cNvSpPr/>
-          <p:nvPr/>
-        </p:nvSpPr>
-        <p:spPr>
-          <a:xfrm rot="21114457">
-            <a:off x="6427123" y="2423818"/>
-            <a:ext cx="852890" cy="852890"/>
-          </a:xfrm>
-          <a:prstGeom prst="star5">
-            <a:avLst/>
-          </a:prstGeom>
-          <a:solidFill>
-            <a:srgbClr val="D0F1E6"/>
-          </a:solidFill>
-          <a:ln>
-            <a:noFill/>
-          </a:ln>
-        </p:spPr>
-        <p:txBody>
-          <a:bodyPr rtlCol="0" anchor="ctr"/>
-          <a:lstStyle/>
-          <a:p>
-            <a:pPr algn="ctr"/>
-          </a:p>
-        </p:txBody>
-      </p:sp>
-      <p:sp>
-        <p:nvSpPr>
-          <p:cNvPr id="10" name="장식"/>
-          <p:cNvSpPr/>
-          <p:nvPr/>
-        </p:nvSpPr>
-        <p:spPr>
-          <a:xfrm rot="21340827">
-            <a:off x="6175236" y="1296230"/>
-            <a:ext cx="435134" cy="435134"/>
-          </a:xfrm>
-          <a:prstGeom prst="star5">
-            <a:avLst/>
-          </a:prstGeom>
-          <a:solidFill>
-            <a:srgbClr val="913B83"/>
-          </a:solidFill>
-          <a:ln>
-            <a:noFill/>
-          </a:ln>
-        </p:spPr>
-        <p:txBody>
-          <a:bodyPr rtlCol="0" anchor="ctr"/>
-          <a:lstStyle/>
-          <a:p>
-            <a:pPr algn="ctr"/>
-          </a:p>
-        </p:txBody>
-      </p:sp>
+        </p:spPr>
+      </p:pic>
       <p:sp>
         <p:nvSpPr>
           <p:cNvPr id="2" name="Title 1"/>
@@ -5968,8 +4666,8 @@
         </p:nvSpPr>
         <p:spPr>
           <a:xfrm>
-            <a:off x="480060" y="2057400"/>
-            <a:ext cx="3771900" cy="1463040"/>
+            <a:off x="685800" y="960120"/>
+            <a:ext cx="5486400" cy="1463040"/>
           </a:xfrm>
         </p:spPr>
         <p:txBody>
@@ -5996,14 +4694,14 @@
       </p:sp>
       <p:sp>
         <p:nvSpPr>
-          <p:cNvPr id="11" name="한 줄 문구"/>
+          <p:cNvPr id="4" name="한 줄 문구"/>
           <p:cNvSpPr txBox="1"/>
           <p:nvPr/>
         </p:nvSpPr>
         <p:spPr>
           <a:xfrm>
-            <a:off x="480060" y="3611880"/>
-            <a:ext cx="3429000" cy="822960"/>
+            <a:off x="685800" y="2560320"/>
+            <a:ext cx="5486400" cy="822960"/>
           </a:xfrm>
           <a:prstGeom prst="rect">
             <a:avLst/>
@@ -6034,14 +4732,14 @@
       </p:sp>
       <p:sp>
         <p:nvSpPr>
-          <p:cNvPr id="12" name="안내 문구"/>
+          <p:cNvPr id="5" name="안내 문구"/>
           <p:cNvSpPr txBox="1"/>
           <p:nvPr/>
         </p:nvSpPr>
         <p:spPr>
           <a:xfrm>
-            <a:off x="480060" y="4480560"/>
-            <a:ext cx="3429000" cy="914400"/>
+            <a:off x="685800" y="3429000"/>
+            <a:ext cx="5486400" cy="914400"/>
           </a:xfrm>
           <a:prstGeom prst="rect">
             <a:avLst/>

--- a/public/fun/pack/pptx/news/카드뉴스_19_감사·칭찬_반딧불마을.pptx
+++ b/public/fun/pack/pptx/news/카드뉴스_19_감사·칭찬_반딧불마을.pptx
@@ -3348,7 +3348,7 @@
             <a:r>
               <a:rPr sz="3000" b="1" i="0">
                 <a:solidFill>
-                  <a:srgbClr val="143D30"/>
+                  <a:srgbClr val="115F45"/>
                 </a:solidFill>
               </a:rPr>
               <a:t>동료에게 고맙다고 말해 본 적 있나요</a:t>
@@ -3386,7 +3386,7 @@
             <a:r>
               <a:rPr sz="1500" b="0" i="1">
                 <a:solidFill>
-                  <a:srgbClr val="143D30"/>
+                  <a:srgbClr val="115F45"/>
                 </a:solidFill>
               </a:rPr>
               <a:t>옆으로 넘겨 보세요 →</a:t>
@@ -3473,7 +3473,7 @@
             <a:avLst/>
           </a:prstGeom>
           <a:solidFill>
-            <a:srgbClr val="D0F1E6"/>
+            <a:srgbClr val="D1FAEC"/>
           </a:solidFill>
           <a:ln>
             <a:noFill/>
@@ -3502,7 +3502,7 @@
             <a:avLst/>
           </a:prstGeom>
           <a:solidFill>
-            <a:srgbClr val="246B53"/>
+            <a:srgbClr val="26C590"/>
           </a:solidFill>
           <a:ln>
             <a:noFill/>
@@ -3546,7 +3546,7 @@
             <a:r>
               <a:rPr sz="2600" b="1" i="0">
                 <a:solidFill>
-                  <a:srgbClr val="143D30"/>
+                  <a:srgbClr val="115F45"/>
                 </a:solidFill>
               </a:rPr>
               <a:t>고맙다는 말 먼저 건네기</a:t>
@@ -3584,7 +3584,7 @@
             <a:r>
               <a:rPr sz="6600" b="1" i="0">
                 <a:solidFill>
-                  <a:srgbClr val="246B53"/>
+                  <a:srgbClr val="26C590"/>
                 </a:solidFill>
               </a:rPr>
               <a:t>01</a:t>
@@ -3709,7 +3709,7 @@
             <a:avLst/>
           </a:prstGeom>
           <a:solidFill>
-            <a:srgbClr val="D0F1E6"/>
+            <a:srgbClr val="D1FAEC"/>
           </a:solidFill>
           <a:ln>
             <a:noFill/>
@@ -3738,7 +3738,7 @@
             <a:avLst/>
           </a:prstGeom>
           <a:solidFill>
-            <a:srgbClr val="246B53"/>
+            <a:srgbClr val="26C590"/>
           </a:solidFill>
           <a:ln>
             <a:noFill/>
@@ -3782,7 +3782,7 @@
             <a:r>
               <a:rPr sz="2600" b="1" i="0">
                 <a:solidFill>
-                  <a:srgbClr val="143D30"/>
+                  <a:srgbClr val="115F45"/>
                 </a:solidFill>
               </a:rPr>
               <a:t>칭찬 한 줄 적어 주기</a:t>
@@ -3820,7 +3820,7 @@
             <a:r>
               <a:rPr sz="6600" b="1" i="0">
                 <a:solidFill>
-                  <a:srgbClr val="246B53"/>
+                  <a:srgbClr val="26C590"/>
                 </a:solidFill>
               </a:rPr>
               <a:t>02</a:t>
@@ -3945,7 +3945,7 @@
             <a:avLst/>
           </a:prstGeom>
           <a:solidFill>
-            <a:srgbClr val="D0F1E6"/>
+            <a:srgbClr val="D1FAEC"/>
           </a:solidFill>
           <a:ln>
             <a:noFill/>
@@ -3974,7 +3974,7 @@
             <a:avLst/>
           </a:prstGeom>
           <a:solidFill>
-            <a:srgbClr val="246B53"/>
+            <a:srgbClr val="26C590"/>
           </a:solidFill>
           <a:ln>
             <a:noFill/>
@@ -4018,7 +4018,7 @@
             <a:r>
               <a:rPr sz="2600" b="1" i="0">
                 <a:solidFill>
-                  <a:srgbClr val="143D30"/>
+                  <a:srgbClr val="115F45"/>
                 </a:solidFill>
               </a:rPr>
               <a:t>퇴근한 사람에게 한마디</a:t>
@@ -4056,7 +4056,7 @@
             <a:r>
               <a:rPr sz="6600" b="1" i="0">
                 <a:solidFill>
-                  <a:srgbClr val="246B53"/>
+                  <a:srgbClr val="26C590"/>
                 </a:solidFill>
               </a:rPr>
               <a:t>03</a:t>
@@ -4181,7 +4181,7 @@
             <a:avLst/>
           </a:prstGeom>
           <a:solidFill>
-            <a:srgbClr val="D0F1E6"/>
+            <a:srgbClr val="D1FAEC"/>
           </a:solidFill>
           <a:ln>
             <a:noFill/>
@@ -4210,7 +4210,7 @@
             <a:avLst/>
           </a:prstGeom>
           <a:solidFill>
-            <a:srgbClr val="246B53"/>
+            <a:srgbClr val="26C590"/>
           </a:solidFill>
           <a:ln>
             <a:noFill/>
@@ -4254,7 +4254,7 @@
             <a:r>
               <a:rPr sz="2600" b="1" i="0">
                 <a:solidFill>
-                  <a:srgbClr val="143D30"/>
+                  <a:srgbClr val="115F45"/>
                 </a:solidFill>
               </a:rPr>
               <a:t>감사 일기 세 줄</a:t>
@@ -4292,7 +4292,7 @@
             <a:r>
               <a:rPr sz="6600" b="1" i="0">
                 <a:solidFill>
-                  <a:srgbClr val="246B53"/>
+                  <a:srgbClr val="26C590"/>
                 </a:solidFill>
               </a:rPr>
               <a:t>04</a:t>
@@ -4417,7 +4417,7 @@
             <a:avLst/>
           </a:prstGeom>
           <a:solidFill>
-            <a:srgbClr val="D0F1E6"/>
+            <a:srgbClr val="D1FAEC"/>
           </a:solidFill>
           <a:ln>
             <a:noFill/>
@@ -4446,7 +4446,7 @@
             <a:avLst/>
           </a:prstGeom>
           <a:solidFill>
-            <a:srgbClr val="246B53"/>
+            <a:srgbClr val="26C590"/>
           </a:solidFill>
           <a:ln>
             <a:noFill/>
@@ -4490,7 +4490,7 @@
             <a:r>
               <a:rPr sz="2600" b="1" i="0">
                 <a:solidFill>
-                  <a:srgbClr val="143D30"/>
+                  <a:srgbClr val="115F45"/>
                 </a:solidFill>
               </a:rPr>
               <a:t>엽서 한 장 쓰기</a:t>
@@ -4528,7 +4528,7 @@
             <a:r>
               <a:rPr sz="6600" b="1" i="0">
                 <a:solidFill>
-                  <a:srgbClr val="246B53"/>
+                  <a:srgbClr val="26C590"/>
                 </a:solidFill>
               </a:rPr>
               <a:t>05</a:t>
@@ -4684,7 +4684,7 @@
             <a:r>
               <a:rPr sz="2800" b="1" i="0">
                 <a:solidFill>
-                  <a:srgbClr val="143D30"/>
+                  <a:srgbClr val="115F45"/>
                 </a:solidFill>
               </a:rPr>
               <a:t>저장해 두고 필요할 때 꺼내 보세요</a:t>
@@ -4722,7 +4722,7 @@
             <a:r>
               <a:rPr sz="1500" b="0" i="1">
                 <a:solidFill>
-                  <a:srgbClr val="143D30"/>
+                  <a:srgbClr val="115F45"/>
                 </a:solidFill>
               </a:rPr>
               <a:t>마음에 들면 공유해 주세요</a:t>
@@ -4787,34 +4787,34 @@
         <a:sysClr val="window" lastClr="FFFFFF"/>
       </a:lt1>
       <a:dk2>
-        <a:srgbClr val="143D30"/>
+        <a:srgbClr val="115F45"/>
       </a:dk2>
       <a:lt2>
-        <a:srgbClr val="F0FAF6"/>
+        <a:srgbClr val="EEFCF7"/>
       </a:lt2>
       <a:accent1>
-        <a:srgbClr val="246B53"/>
+        <a:srgbClr val="26C590"/>
       </a:accent1>
       <a:accent2>
-        <a:srgbClr val="913B83"/>
+        <a:srgbClr val="209DB6"/>
       </a:accent2>
       <a:accent3>
-        <a:srgbClr val="143D30"/>
+        <a:srgbClr val="115F45"/>
       </a:accent3>
       <a:accent4>
-        <a:srgbClr val="D0F1E6"/>
+        <a:srgbClr val="D1FAEC"/>
       </a:accent4>
       <a:accent5>
-        <a:srgbClr val="5A536B"/>
+        <a:srgbClr val="23B1A3"/>
       </a:accent5>
       <a:accent6>
-        <a:srgbClr val="728B83"/>
+        <a:srgbClr val="709F8F"/>
       </a:accent6>
       <a:hlink>
-        <a:srgbClr val="246B53"/>
+        <a:srgbClr val="26C590"/>
       </a:hlink>
       <a:folHlink>
-        <a:srgbClr val="143D30"/>
+        <a:srgbClr val="115F45"/>
       </a:folHlink>
     </a:clrScheme>
     <a:fontScheme name="Office">

--- a/public/fun/pack/pptx/news/카드뉴스_19_감사·칭찬_반딧불마을.pptx
+++ b/public/fun/pack/pptx/news/카드뉴스_19_감사·칭찬_반딧불마을.pptx
@@ -3287,6 +3287,14 @@
 <file path=ppt/slides/slide1.xml><?xml version="1.0" encoding="utf-8"?>
 <p:sld xmlns:a="http://schemas.openxmlformats.org/drawingml/2006/main" xmlns:p="http://schemas.openxmlformats.org/presentationml/2006/main" xmlns:r="http://schemas.openxmlformats.org/officeDocument/2006/relationships">
   <p:cSld>
+    <p:bg>
+      <p:bgPr>
+        <a:solidFill>
+          <a:srgbClr val="27493E"/>
+        </a:solidFill>
+        <a:effectLst/>
+      </p:bgPr>
+    </p:bg>
     <p:spTree>
       <p:nvGrpSpPr>
         <p:cNvPr id="1" name=""/>
@@ -3294,30 +3302,102 @@
         <p:nvPr/>
       </p:nvGrpSpPr>
       <p:grpSpPr/>
-      <p:pic>
-        <p:nvPicPr>
-          <p:cNvPr id="3" name="표지 그림" descr="news-19.jpg"/>
-          <p:cNvPicPr>
-            <a:picLocks noChangeAspect="1"/>
-          </p:cNvPicPr>
+      <p:sp>
+        <p:nvSpPr>
+          <p:cNvPr id="3" name="장식"/>
+          <p:cNvSpPr/>
           <p:nvPr/>
-        </p:nvPicPr>
-        <p:blipFill>
-          <a:blip r:embed="rId2"/>
-          <a:stretch>
-            <a:fillRect/>
-          </a:stretch>
-        </p:blipFill>
-        <p:spPr>
-          <a:xfrm>
-            <a:off x="0" y="0"/>
-            <a:ext cx="6858000" cy="6858000"/>
+        </p:nvSpPr>
+        <p:spPr>
+          <a:xfrm>
+            <a:off x="1600200" y="822960"/>
+            <a:ext cx="3657600" cy="3657600"/>
+          </a:xfrm>
+          <a:prstGeom prst="ellipse">
+            <a:avLst/>
+          </a:prstGeom>
+          <a:solidFill>
+            <a:srgbClr val="7BEAC5"/>
+          </a:solidFill>
+          <a:ln>
+            <a:noFill/>
+          </a:ln>
+        </p:spPr>
+        <p:txBody>
+          <a:bodyPr rtlCol="0" anchor="ctr"/>
+          <a:lstStyle/>
+          <a:p>
+            <a:pPr algn="ctr"/>
+          </a:p>
+        </p:txBody>
+      </p:sp>
+      <p:sp>
+        <p:nvSpPr>
+          <p:cNvPr id="4" name="장식"/>
+          <p:cNvSpPr/>
+          <p:nvPr/>
+        </p:nvSpPr>
+        <p:spPr>
+          <a:xfrm>
+            <a:off x="3246120" y="502920"/>
+            <a:ext cx="822960" cy="822960"/>
+          </a:xfrm>
+          <a:prstGeom prst="ellipse">
+            <a:avLst/>
+          </a:prstGeom>
+          <a:solidFill>
+            <a:srgbClr val="5EB296"/>
+          </a:solidFill>
+          <a:ln>
+            <a:noFill/>
+          </a:ln>
+        </p:spPr>
+        <p:txBody>
+          <a:bodyPr rtlCol="0" anchor="ctr"/>
+          <a:lstStyle/>
+          <a:p>
+            <a:pPr algn="ctr"/>
+          </a:p>
+        </p:txBody>
+      </p:sp>
+      <p:sp>
+        <p:nvSpPr>
+          <p:cNvPr id="5" name="라벨"/>
+          <p:cNvSpPr txBox="1"/>
+          <p:nvPr/>
+        </p:nvSpPr>
+        <p:spPr>
+          <a:xfrm>
+            <a:off x="731520" y="4572000"/>
+            <a:ext cx="5394960" cy="274320"/>
           </a:xfrm>
           <a:prstGeom prst="rect">
             <a:avLst/>
           </a:prstGeom>
-        </p:spPr>
-      </p:pic>
+          <a:noFill/>
+        </p:spPr>
+        <p:txBody>
+          <a:bodyPr wrap="square" lIns="54864" rIns="54864" tIns="27432" bIns="27432" anchor="t">
+            <a:noAutofit/>
+          </a:bodyPr>
+          <a:lstStyle/>
+          <a:p>
+            <a:pPr algn="ctr">
+              <a:lnSpc>
+                <a:spcPct val="115000"/>
+              </a:lnSpc>
+            </a:pPr>
+            <a:r>
+              <a:rPr sz="1000" b="1" i="0" spc="250">
+                <a:solidFill>
+                  <a:srgbClr val="FFFFFF"/>
+                </a:solidFill>
+              </a:rPr>
+              <a:t>CARD NEWS</a:t>
+            </a:r>
+          </a:p>
+        </p:txBody>
+      </p:sp>
       <p:sp>
         <p:nvSpPr>
           <p:cNvPr id="2" name="Title 1"/>
@@ -3330,8 +3410,8 @@
         </p:nvSpPr>
         <p:spPr>
           <a:xfrm>
-            <a:off x="685800" y="960120"/>
-            <a:ext cx="5486400" cy="1463040"/>
+            <a:off x="731520" y="4892040"/>
+            <a:ext cx="5394960" cy="914400"/>
           </a:xfrm>
         </p:spPr>
         <p:txBody>
@@ -3340,7 +3420,7 @@
           </a:bodyPr>
           <a:lstStyle/>
           <a:p>
-            <a:pPr algn="l">
+            <a:pPr algn="ctr">
               <a:lnSpc>
                 <a:spcPct val="105000"/>
               </a:lnSpc>
@@ -3348,7 +3428,7 @@
             <a:r>
               <a:rPr sz="3000" b="1" i="0">
                 <a:solidFill>
-                  <a:srgbClr val="12684B"/>
+                  <a:srgbClr val="FFFFFF"/>
                 </a:solidFill>
               </a:rPr>
               <a:t>동료에게 고맙다고 말해 본 적 있나요</a:t>
@@ -3358,14 +3438,14 @@
       </p:sp>
       <p:sp>
         <p:nvSpPr>
-          <p:cNvPr id="4" name="한 줄 문구"/>
+          <p:cNvPr id="6" name="한 줄 문구"/>
           <p:cNvSpPr txBox="1"/>
           <p:nvPr/>
         </p:nvSpPr>
         <p:spPr>
           <a:xfrm>
-            <a:off x="685800" y="2560320"/>
-            <a:ext cx="5486400" cy="822960"/>
+            <a:off x="731520" y="5806440"/>
+            <a:ext cx="5394960" cy="822960"/>
           </a:xfrm>
           <a:prstGeom prst="rect">
             <a:avLst/>
@@ -3378,15 +3458,15 @@
           </a:bodyPr>
           <a:lstStyle/>
           <a:p>
-            <a:pPr algn="l">
+            <a:pPr algn="ctr">
               <a:lnSpc>
                 <a:spcPct val="115000"/>
               </a:lnSpc>
             </a:pPr>
             <a:r>
-              <a:rPr sz="1500" b="0" i="1">
+              <a:rPr sz="1500" b="0" i="0">
                 <a:solidFill>
-                  <a:srgbClr val="12684B"/>
+                  <a:srgbClr val="FFFFFF"/>
                 </a:solidFill>
               </a:rPr>
               <a:t>옆으로 넘겨 보세요 →</a:t>
@@ -3396,14 +3476,14 @@
       </p:sp>
       <p:sp>
         <p:nvSpPr>
-          <p:cNvPr id="5" name="안내 문구"/>
+          <p:cNvPr id="7" name="안내 문구"/>
           <p:cNvSpPr txBox="1"/>
           <p:nvPr/>
         </p:nvSpPr>
         <p:spPr>
           <a:xfrm>
-            <a:off x="685800" y="3429000"/>
-            <a:ext cx="5486400" cy="914400"/>
+            <a:off x="731520" y="6675120"/>
+            <a:ext cx="5394960" cy="914400"/>
           </a:xfrm>
           <a:prstGeom prst="rect">
             <a:avLst/>
@@ -3416,7 +3496,7 @@
           </a:bodyPr>
           <a:lstStyle/>
           <a:p>
-            <a:pPr algn="l">
+            <a:pPr algn="ctr">
               <a:lnSpc>
                 <a:spcPct val="115000"/>
               </a:lnSpc>
@@ -3424,7 +3504,7 @@
             <a:r>
               <a:rPr sz="1200" b="0" i="0">
                 <a:solidFill>
-                  <a:srgbClr val="666666"/>
+                  <a:srgbClr val="FFFFFF"/>
                 </a:solidFill>
               </a:rPr>
               <a:t>감사·칭찬 · 카드뉴스</a:t>
@@ -3446,7 +3526,7 @@
     <p:bg>
       <p:bgPr>
         <a:solidFill>
-          <a:srgbClr val="FFFFFF"/>
+          <a:srgbClr val="EAFDF7"/>
         </a:solidFill>
         <a:effectLst/>
       </p:bgPr>
@@ -3460,20 +3540,20 @@
       <p:grpSpPr/>
       <p:sp>
         <p:nvSpPr>
-          <p:cNvPr id="3" name="장식"/>
+          <p:cNvPr id="3" name="포인트"/>
           <p:cNvSpPr/>
           <p:nvPr/>
         </p:nvSpPr>
         <p:spPr>
           <a:xfrm>
-            <a:off x="4572000" y="-1463040"/>
-            <a:ext cx="3840480" cy="3840480"/>
-          </a:xfrm>
-          <a:prstGeom prst="ellipse">
+            <a:off x="3291840" y="246888"/>
+            <a:ext cx="274320" cy="274320"/>
+          </a:xfrm>
+          <a:prstGeom prst="heart">
             <a:avLst/>
           </a:prstGeom>
           <a:solidFill>
-            <a:srgbClr val="D9FCF0"/>
+            <a:srgbClr val="7BEAC5"/>
           </a:solidFill>
           <a:ln>
             <a:noFill/>
@@ -3495,14 +3575,14 @@
         </p:nvSpPr>
         <p:spPr>
           <a:xfrm>
-            <a:off x="5760720" y="274320"/>
-            <a:ext cx="411480" cy="411480"/>
-          </a:xfrm>
-          <a:prstGeom prst="ellipse">
+            <a:off x="3017520" y="1572768"/>
+            <a:ext cx="822960" cy="22860"/>
+          </a:xfrm>
+          <a:prstGeom prst="rect">
             <a:avLst/>
           </a:prstGeom>
           <a:solidFill>
-            <a:srgbClr val="3EE0AA"/>
+            <a:srgbClr val="7BEAC5"/>
           </a:solidFill>
           <a:ln>
             <a:noFill/>
@@ -3518,52 +3598,14 @@
       </p:sp>
       <p:sp>
         <p:nvSpPr>
-          <p:cNvPr id="2" name="Title 1"/>
-          <p:cNvSpPr>
-            <a:spLocks noGrp="1"/>
-          </p:cNvSpPr>
-          <p:nvPr>
-            <p:ph type="title"/>
-          </p:nvPr>
-        </p:nvSpPr>
-        <p:spPr>
-          <a:xfrm>
-            <a:off x="640080" y="457200"/>
-            <a:ext cx="4389120" cy="868680"/>
-          </a:xfrm>
-        </p:spPr>
-        <p:txBody>
-          <a:bodyPr wrap="square" lIns="54864" rIns="54864" tIns="27432" bIns="27432" anchor="ctr">
-            <a:noAutofit/>
-          </a:bodyPr>
-          <a:lstStyle/>
-          <a:p>
-            <a:pPr algn="l">
-              <a:lnSpc>
-                <a:spcPct val="105000"/>
-              </a:lnSpc>
-            </a:pPr>
-            <a:r>
-              <a:rPr sz="2600" b="1" i="0">
-                <a:solidFill>
-                  <a:srgbClr val="12684B"/>
-                </a:solidFill>
-              </a:rPr>
-              <a:t>고맙다는 말 먼저 건네기</a:t>
-            </a:r>
-          </a:p>
-        </p:txBody>
-      </p:sp>
-      <p:sp>
-        <p:nvSpPr>
-          <p:cNvPr id="5" name="번호"/>
+          <p:cNvPr id="5" name="상단 라벨"/>
           <p:cNvSpPr txBox="1"/>
           <p:nvPr/>
         </p:nvSpPr>
         <p:spPr>
           <a:xfrm>
-            <a:off x="640080" y="1691640"/>
-            <a:ext cx="2194560" cy="1280160"/>
+            <a:off x="640080" y="182880"/>
+            <a:ext cx="3657600" cy="274320"/>
           </a:xfrm>
           <a:prstGeom prst="rect">
             <a:avLst/>
@@ -3571,7 +3613,7 @@
           <a:noFill/>
         </p:spPr>
         <p:txBody>
-          <a:bodyPr wrap="square" lIns="54864" rIns="54864" tIns="27432" bIns="27432" anchor="t">
+          <a:bodyPr wrap="square" lIns="54864" rIns="54864" tIns="27432" bIns="27432" anchor="ctr">
             <a:noAutofit/>
           </a:bodyPr>
           <a:lstStyle/>
@@ -3582,9 +3624,85 @@
               </a:lnSpc>
             </a:pPr>
             <a:r>
+              <a:rPr sz="800" b="1" i="0" spc="250">
+                <a:solidFill>
+                  <a:srgbClr val="8E8780"/>
+                </a:solidFill>
+              </a:rPr>
+              <a:t>CARD NEWS</a:t>
+            </a:r>
+          </a:p>
+        </p:txBody>
+      </p:sp>
+      <p:sp>
+        <p:nvSpPr>
+          <p:cNvPr id="2" name="Title 1"/>
+          <p:cNvSpPr>
+            <a:spLocks noGrp="1"/>
+          </p:cNvSpPr>
+          <p:nvPr>
+            <p:ph type="title"/>
+          </p:nvPr>
+        </p:nvSpPr>
+        <p:spPr>
+          <a:xfrm>
+            <a:off x="1371600" y="640080"/>
+            <a:ext cx="4114800" cy="868680"/>
+          </a:xfrm>
+        </p:spPr>
+        <p:txBody>
+          <a:bodyPr wrap="square" lIns="54864" rIns="54864" tIns="27432" bIns="27432" anchor="ctr">
+            <a:noAutofit/>
+          </a:bodyPr>
+          <a:lstStyle/>
+          <a:p>
+            <a:pPr algn="ctr">
+              <a:lnSpc>
+                <a:spcPct val="105000"/>
+              </a:lnSpc>
+            </a:pPr>
+            <a:r>
+              <a:rPr sz="2600" b="1" i="0">
+                <a:solidFill>
+                  <a:srgbClr val="26231F"/>
+                </a:solidFill>
+              </a:rPr>
+              <a:t>고맙다는 말 먼저 건네기</a:t>
+            </a:r>
+          </a:p>
+        </p:txBody>
+      </p:sp>
+      <p:sp>
+        <p:nvSpPr>
+          <p:cNvPr id="6" name="번호"/>
+          <p:cNvSpPr txBox="1"/>
+          <p:nvPr/>
+        </p:nvSpPr>
+        <p:spPr>
+          <a:xfrm>
+            <a:off x="640080" y="1874519"/>
+            <a:ext cx="2194560" cy="1280160"/>
+          </a:xfrm>
+          <a:prstGeom prst="rect">
+            <a:avLst/>
+          </a:prstGeom>
+          <a:noFill/>
+        </p:spPr>
+        <p:txBody>
+          <a:bodyPr wrap="square" lIns="54864" rIns="54864" tIns="27432" bIns="27432" anchor="t">
+            <a:noAutofit/>
+          </a:bodyPr>
+          <a:lstStyle/>
+          <a:p>
+            <a:pPr algn="l">
+              <a:lnSpc>
+                <a:spcPct val="115000"/>
+              </a:lnSpc>
+            </a:pPr>
+            <a:r>
               <a:rPr sz="6600" b="1" i="0">
                 <a:solidFill>
-                  <a:srgbClr val="3EE0AA"/>
+                  <a:srgbClr val="7BEAC5"/>
                 </a:solidFill>
               </a:rPr>
               <a:t>01</a:t>
@@ -3594,13 +3712,13 @@
       </p:sp>
       <p:sp>
         <p:nvSpPr>
-          <p:cNvPr id="6" name="본문"/>
+          <p:cNvPr id="7" name="본문"/>
           <p:cNvSpPr txBox="1"/>
           <p:nvPr/>
         </p:nvSpPr>
         <p:spPr>
           <a:xfrm>
-            <a:off x="640080" y="3154680"/>
+            <a:off x="640080" y="3337560"/>
             <a:ext cx="5577840" cy="2651760"/>
           </a:xfrm>
           <a:prstGeom prst="rect">
@@ -3622,7 +3740,7 @@
             <a:r>
               <a:rPr sz="2800" b="0" i="0">
                 <a:solidFill>
-                  <a:srgbClr val="2B2B2B"/>
+                  <a:srgbClr val="26231F"/>
                 </a:solidFill>
               </a:rPr>
               <a:t>작은 일에도 ‘고마워요’를 먼저 말해 보세요.</a:t>
@@ -3632,13 +3750,13 @@
       </p:sp>
       <p:sp>
         <p:nvSpPr>
-          <p:cNvPr id="7" name="쪽 번호"/>
+          <p:cNvPr id="8" name="쪽 번호"/>
           <p:cNvSpPr txBox="1"/>
           <p:nvPr/>
         </p:nvSpPr>
         <p:spPr>
           <a:xfrm>
-            <a:off x="640080" y="6035040"/>
+            <a:off x="640080" y="5989320"/>
             <a:ext cx="5577840" cy="365760"/>
           </a:xfrm>
           <a:prstGeom prst="rect">
@@ -3682,7 +3800,7 @@
     <p:bg>
       <p:bgPr>
         <a:solidFill>
-          <a:srgbClr val="FFFFFF"/>
+          <a:srgbClr val="EAFDF7"/>
         </a:solidFill>
         <a:effectLst/>
       </p:bgPr>
@@ -3696,20 +3814,20 @@
       <p:grpSpPr/>
       <p:sp>
         <p:nvSpPr>
-          <p:cNvPr id="3" name="장식"/>
+          <p:cNvPr id="3" name="포인트"/>
           <p:cNvSpPr/>
           <p:nvPr/>
         </p:nvSpPr>
         <p:spPr>
           <a:xfrm>
-            <a:off x="4572000" y="-1463040"/>
-            <a:ext cx="3840480" cy="3840480"/>
-          </a:xfrm>
-          <a:prstGeom prst="ellipse">
+            <a:off x="3291840" y="246888"/>
+            <a:ext cx="274320" cy="274320"/>
+          </a:xfrm>
+          <a:prstGeom prst="heart">
             <a:avLst/>
           </a:prstGeom>
           <a:solidFill>
-            <a:srgbClr val="D9FCF0"/>
+            <a:srgbClr val="7BEAC5"/>
           </a:solidFill>
           <a:ln>
             <a:noFill/>
@@ -3731,14 +3849,14 @@
         </p:nvSpPr>
         <p:spPr>
           <a:xfrm>
-            <a:off x="5760720" y="274320"/>
-            <a:ext cx="411480" cy="411480"/>
-          </a:xfrm>
-          <a:prstGeom prst="ellipse">
+            <a:off x="3017520" y="1572768"/>
+            <a:ext cx="822960" cy="22860"/>
+          </a:xfrm>
+          <a:prstGeom prst="rect">
             <a:avLst/>
           </a:prstGeom>
           <a:solidFill>
-            <a:srgbClr val="3EE0AA"/>
+            <a:srgbClr val="7BEAC5"/>
           </a:solidFill>
           <a:ln>
             <a:noFill/>
@@ -3754,52 +3872,14 @@
       </p:sp>
       <p:sp>
         <p:nvSpPr>
-          <p:cNvPr id="2" name="Title 1"/>
-          <p:cNvSpPr>
-            <a:spLocks noGrp="1"/>
-          </p:cNvSpPr>
-          <p:nvPr>
-            <p:ph type="title"/>
-          </p:nvPr>
-        </p:nvSpPr>
-        <p:spPr>
-          <a:xfrm>
-            <a:off x="640080" y="457200"/>
-            <a:ext cx="4389120" cy="868680"/>
-          </a:xfrm>
-        </p:spPr>
-        <p:txBody>
-          <a:bodyPr wrap="square" lIns="54864" rIns="54864" tIns="27432" bIns="27432" anchor="ctr">
-            <a:noAutofit/>
-          </a:bodyPr>
-          <a:lstStyle/>
-          <a:p>
-            <a:pPr algn="l">
-              <a:lnSpc>
-                <a:spcPct val="105000"/>
-              </a:lnSpc>
-            </a:pPr>
-            <a:r>
-              <a:rPr sz="2600" b="1" i="0">
-                <a:solidFill>
-                  <a:srgbClr val="12684B"/>
-                </a:solidFill>
-              </a:rPr>
-              <a:t>칭찬 한 줄 적어 주기</a:t>
-            </a:r>
-          </a:p>
-        </p:txBody>
-      </p:sp>
-      <p:sp>
-        <p:nvSpPr>
-          <p:cNvPr id="5" name="번호"/>
+          <p:cNvPr id="5" name="상단 라벨"/>
           <p:cNvSpPr txBox="1"/>
           <p:nvPr/>
         </p:nvSpPr>
         <p:spPr>
           <a:xfrm>
-            <a:off x="640080" y="1691640"/>
-            <a:ext cx="2194560" cy="1280160"/>
+            <a:off x="640080" y="182880"/>
+            <a:ext cx="3657600" cy="274320"/>
           </a:xfrm>
           <a:prstGeom prst="rect">
             <a:avLst/>
@@ -3807,7 +3887,7 @@
           <a:noFill/>
         </p:spPr>
         <p:txBody>
-          <a:bodyPr wrap="square" lIns="54864" rIns="54864" tIns="27432" bIns="27432" anchor="t">
+          <a:bodyPr wrap="square" lIns="54864" rIns="54864" tIns="27432" bIns="27432" anchor="ctr">
             <a:noAutofit/>
           </a:bodyPr>
           <a:lstStyle/>
@@ -3818,9 +3898,85 @@
               </a:lnSpc>
             </a:pPr>
             <a:r>
+              <a:rPr sz="800" b="1" i="0" spc="250">
+                <a:solidFill>
+                  <a:srgbClr val="8E8780"/>
+                </a:solidFill>
+              </a:rPr>
+              <a:t>CARD NEWS</a:t>
+            </a:r>
+          </a:p>
+        </p:txBody>
+      </p:sp>
+      <p:sp>
+        <p:nvSpPr>
+          <p:cNvPr id="2" name="Title 1"/>
+          <p:cNvSpPr>
+            <a:spLocks noGrp="1"/>
+          </p:cNvSpPr>
+          <p:nvPr>
+            <p:ph type="title"/>
+          </p:nvPr>
+        </p:nvSpPr>
+        <p:spPr>
+          <a:xfrm>
+            <a:off x="1371600" y="640080"/>
+            <a:ext cx="4114800" cy="868680"/>
+          </a:xfrm>
+        </p:spPr>
+        <p:txBody>
+          <a:bodyPr wrap="square" lIns="54864" rIns="54864" tIns="27432" bIns="27432" anchor="ctr">
+            <a:noAutofit/>
+          </a:bodyPr>
+          <a:lstStyle/>
+          <a:p>
+            <a:pPr algn="ctr">
+              <a:lnSpc>
+                <a:spcPct val="105000"/>
+              </a:lnSpc>
+            </a:pPr>
+            <a:r>
+              <a:rPr sz="2600" b="1" i="0">
+                <a:solidFill>
+                  <a:srgbClr val="26231F"/>
+                </a:solidFill>
+              </a:rPr>
+              <a:t>칭찬 한 줄 적어 주기</a:t>
+            </a:r>
+          </a:p>
+        </p:txBody>
+      </p:sp>
+      <p:sp>
+        <p:nvSpPr>
+          <p:cNvPr id="6" name="번호"/>
+          <p:cNvSpPr txBox="1"/>
+          <p:nvPr/>
+        </p:nvSpPr>
+        <p:spPr>
+          <a:xfrm>
+            <a:off x="640080" y="1874519"/>
+            <a:ext cx="2194560" cy="1280160"/>
+          </a:xfrm>
+          <a:prstGeom prst="rect">
+            <a:avLst/>
+          </a:prstGeom>
+          <a:noFill/>
+        </p:spPr>
+        <p:txBody>
+          <a:bodyPr wrap="square" lIns="54864" rIns="54864" tIns="27432" bIns="27432" anchor="t">
+            <a:noAutofit/>
+          </a:bodyPr>
+          <a:lstStyle/>
+          <a:p>
+            <a:pPr algn="l">
+              <a:lnSpc>
+                <a:spcPct val="115000"/>
+              </a:lnSpc>
+            </a:pPr>
+            <a:r>
               <a:rPr sz="6600" b="1" i="0">
                 <a:solidFill>
-                  <a:srgbClr val="3EE0AA"/>
+                  <a:srgbClr val="7BEAC5"/>
                 </a:solidFill>
               </a:rPr>
               <a:t>02</a:t>
@@ -3830,13 +3986,13 @@
       </p:sp>
       <p:sp>
         <p:nvSpPr>
-          <p:cNvPr id="6" name="본문"/>
+          <p:cNvPr id="7" name="본문"/>
           <p:cNvSpPr txBox="1"/>
           <p:nvPr/>
         </p:nvSpPr>
         <p:spPr>
           <a:xfrm>
-            <a:off x="640080" y="3154680"/>
+            <a:off x="640080" y="3337560"/>
             <a:ext cx="5577840" cy="2651760"/>
           </a:xfrm>
           <a:prstGeom prst="rect">
@@ -3858,7 +4014,7 @@
             <a:r>
               <a:rPr sz="2800" b="0" i="0">
                 <a:solidFill>
-                  <a:srgbClr val="2B2B2B"/>
+                  <a:srgbClr val="26231F"/>
                 </a:solidFill>
               </a:rPr>
               <a:t>메모지에 칭찬 한 줄을 적어 가족 책상에 붙여 보세요.</a:t>
@@ -3868,13 +4024,13 @@
       </p:sp>
       <p:sp>
         <p:nvSpPr>
-          <p:cNvPr id="7" name="쪽 번호"/>
+          <p:cNvPr id="8" name="쪽 번호"/>
           <p:cNvSpPr txBox="1"/>
           <p:nvPr/>
         </p:nvSpPr>
         <p:spPr>
           <a:xfrm>
-            <a:off x="640080" y="6035040"/>
+            <a:off x="640080" y="5989320"/>
             <a:ext cx="5577840" cy="365760"/>
           </a:xfrm>
           <a:prstGeom prst="rect">
@@ -3918,7 +4074,7 @@
     <p:bg>
       <p:bgPr>
         <a:solidFill>
-          <a:srgbClr val="FFFFFF"/>
+          <a:srgbClr val="EAFDF7"/>
         </a:solidFill>
         <a:effectLst/>
       </p:bgPr>
@@ -3932,20 +4088,20 @@
       <p:grpSpPr/>
       <p:sp>
         <p:nvSpPr>
-          <p:cNvPr id="3" name="장식"/>
+          <p:cNvPr id="3" name="포인트"/>
           <p:cNvSpPr/>
           <p:nvPr/>
         </p:nvSpPr>
         <p:spPr>
           <a:xfrm>
-            <a:off x="4572000" y="-1463040"/>
-            <a:ext cx="3840480" cy="3840480"/>
-          </a:xfrm>
-          <a:prstGeom prst="ellipse">
+            <a:off x="3291840" y="246888"/>
+            <a:ext cx="274320" cy="274320"/>
+          </a:xfrm>
+          <a:prstGeom prst="heart">
             <a:avLst/>
           </a:prstGeom>
           <a:solidFill>
-            <a:srgbClr val="D9FCF0"/>
+            <a:srgbClr val="7BEAC5"/>
           </a:solidFill>
           <a:ln>
             <a:noFill/>
@@ -3967,14 +4123,14 @@
         </p:nvSpPr>
         <p:spPr>
           <a:xfrm>
-            <a:off x="5760720" y="274320"/>
-            <a:ext cx="411480" cy="411480"/>
-          </a:xfrm>
-          <a:prstGeom prst="ellipse">
+            <a:off x="3017520" y="1572768"/>
+            <a:ext cx="822960" cy="22860"/>
+          </a:xfrm>
+          <a:prstGeom prst="rect">
             <a:avLst/>
           </a:prstGeom>
           <a:solidFill>
-            <a:srgbClr val="3EE0AA"/>
+            <a:srgbClr val="7BEAC5"/>
           </a:solidFill>
           <a:ln>
             <a:noFill/>
@@ -3990,52 +4146,14 @@
       </p:sp>
       <p:sp>
         <p:nvSpPr>
-          <p:cNvPr id="2" name="Title 1"/>
-          <p:cNvSpPr>
-            <a:spLocks noGrp="1"/>
-          </p:cNvSpPr>
-          <p:nvPr>
-            <p:ph type="title"/>
-          </p:nvPr>
-        </p:nvSpPr>
-        <p:spPr>
-          <a:xfrm>
-            <a:off x="640080" y="457200"/>
-            <a:ext cx="4389120" cy="868680"/>
-          </a:xfrm>
-        </p:spPr>
-        <p:txBody>
-          <a:bodyPr wrap="square" lIns="54864" rIns="54864" tIns="27432" bIns="27432" anchor="ctr">
-            <a:noAutofit/>
-          </a:bodyPr>
-          <a:lstStyle/>
-          <a:p>
-            <a:pPr algn="l">
-              <a:lnSpc>
-                <a:spcPct val="105000"/>
-              </a:lnSpc>
-            </a:pPr>
-            <a:r>
-              <a:rPr sz="2600" b="1" i="0">
-                <a:solidFill>
-                  <a:srgbClr val="12684B"/>
-                </a:solidFill>
-              </a:rPr>
-              <a:t>퇴근한 사람에게 한마디</a:t>
-            </a:r>
-          </a:p>
-        </p:txBody>
-      </p:sp>
-      <p:sp>
-        <p:nvSpPr>
-          <p:cNvPr id="5" name="번호"/>
+          <p:cNvPr id="5" name="상단 라벨"/>
           <p:cNvSpPr txBox="1"/>
           <p:nvPr/>
         </p:nvSpPr>
         <p:spPr>
           <a:xfrm>
-            <a:off x="640080" y="1691640"/>
-            <a:ext cx="2194560" cy="1280160"/>
+            <a:off x="640080" y="182880"/>
+            <a:ext cx="3657600" cy="274320"/>
           </a:xfrm>
           <a:prstGeom prst="rect">
             <a:avLst/>
@@ -4043,7 +4161,7 @@
           <a:noFill/>
         </p:spPr>
         <p:txBody>
-          <a:bodyPr wrap="square" lIns="54864" rIns="54864" tIns="27432" bIns="27432" anchor="t">
+          <a:bodyPr wrap="square" lIns="54864" rIns="54864" tIns="27432" bIns="27432" anchor="ctr">
             <a:noAutofit/>
           </a:bodyPr>
           <a:lstStyle/>
@@ -4054,9 +4172,85 @@
               </a:lnSpc>
             </a:pPr>
             <a:r>
+              <a:rPr sz="800" b="1" i="0" spc="250">
+                <a:solidFill>
+                  <a:srgbClr val="8E8780"/>
+                </a:solidFill>
+              </a:rPr>
+              <a:t>CARD NEWS</a:t>
+            </a:r>
+          </a:p>
+        </p:txBody>
+      </p:sp>
+      <p:sp>
+        <p:nvSpPr>
+          <p:cNvPr id="2" name="Title 1"/>
+          <p:cNvSpPr>
+            <a:spLocks noGrp="1"/>
+          </p:cNvSpPr>
+          <p:nvPr>
+            <p:ph type="title"/>
+          </p:nvPr>
+        </p:nvSpPr>
+        <p:spPr>
+          <a:xfrm>
+            <a:off x="1371600" y="640080"/>
+            <a:ext cx="4114800" cy="868680"/>
+          </a:xfrm>
+        </p:spPr>
+        <p:txBody>
+          <a:bodyPr wrap="square" lIns="54864" rIns="54864" tIns="27432" bIns="27432" anchor="ctr">
+            <a:noAutofit/>
+          </a:bodyPr>
+          <a:lstStyle/>
+          <a:p>
+            <a:pPr algn="ctr">
+              <a:lnSpc>
+                <a:spcPct val="105000"/>
+              </a:lnSpc>
+            </a:pPr>
+            <a:r>
+              <a:rPr sz="2600" b="1" i="0">
+                <a:solidFill>
+                  <a:srgbClr val="26231F"/>
+                </a:solidFill>
+              </a:rPr>
+              <a:t>퇴근한 사람에게 한마디</a:t>
+            </a:r>
+          </a:p>
+        </p:txBody>
+      </p:sp>
+      <p:sp>
+        <p:nvSpPr>
+          <p:cNvPr id="6" name="번호"/>
+          <p:cNvSpPr txBox="1"/>
+          <p:nvPr/>
+        </p:nvSpPr>
+        <p:spPr>
+          <a:xfrm>
+            <a:off x="640080" y="1874519"/>
+            <a:ext cx="2194560" cy="1280160"/>
+          </a:xfrm>
+          <a:prstGeom prst="rect">
+            <a:avLst/>
+          </a:prstGeom>
+          <a:noFill/>
+        </p:spPr>
+        <p:txBody>
+          <a:bodyPr wrap="square" lIns="54864" rIns="54864" tIns="27432" bIns="27432" anchor="t">
+            <a:noAutofit/>
+          </a:bodyPr>
+          <a:lstStyle/>
+          <a:p>
+            <a:pPr algn="l">
+              <a:lnSpc>
+                <a:spcPct val="115000"/>
+              </a:lnSpc>
+            </a:pPr>
+            <a:r>
               <a:rPr sz="6600" b="1" i="0">
                 <a:solidFill>
-                  <a:srgbClr val="3EE0AA"/>
+                  <a:srgbClr val="7BEAC5"/>
                 </a:solidFill>
               </a:rPr>
               <a:t>03</a:t>
@@ -4066,13 +4260,13 @@
       </p:sp>
       <p:sp>
         <p:nvSpPr>
-          <p:cNvPr id="6" name="본문"/>
+          <p:cNvPr id="7" name="본문"/>
           <p:cNvSpPr txBox="1"/>
           <p:nvPr/>
         </p:nvSpPr>
         <p:spPr>
           <a:xfrm>
-            <a:off x="640080" y="3154680"/>
+            <a:off x="640080" y="3337560"/>
             <a:ext cx="5577840" cy="2651760"/>
           </a:xfrm>
           <a:prstGeom prst="rect">
@@ -4094,7 +4288,7 @@
             <a:r>
               <a:rPr sz="2800" b="0" i="0">
                 <a:solidFill>
-                  <a:srgbClr val="2B2B2B"/>
+                  <a:srgbClr val="26231F"/>
                 </a:solidFill>
               </a:rPr>
               <a:t>‘오늘도 고생했어’ 한마디면 충분해요.</a:t>
@@ -4104,13 +4298,13 @@
       </p:sp>
       <p:sp>
         <p:nvSpPr>
-          <p:cNvPr id="7" name="쪽 번호"/>
+          <p:cNvPr id="8" name="쪽 번호"/>
           <p:cNvSpPr txBox="1"/>
           <p:nvPr/>
         </p:nvSpPr>
         <p:spPr>
           <a:xfrm>
-            <a:off x="640080" y="6035040"/>
+            <a:off x="640080" y="5989320"/>
             <a:ext cx="5577840" cy="365760"/>
           </a:xfrm>
           <a:prstGeom prst="rect">
@@ -4154,7 +4348,7 @@
     <p:bg>
       <p:bgPr>
         <a:solidFill>
-          <a:srgbClr val="FFFFFF"/>
+          <a:srgbClr val="EAFDF7"/>
         </a:solidFill>
         <a:effectLst/>
       </p:bgPr>
@@ -4168,20 +4362,20 @@
       <p:grpSpPr/>
       <p:sp>
         <p:nvSpPr>
-          <p:cNvPr id="3" name="장식"/>
+          <p:cNvPr id="3" name="포인트"/>
           <p:cNvSpPr/>
           <p:nvPr/>
         </p:nvSpPr>
         <p:spPr>
           <a:xfrm>
-            <a:off x="4572000" y="-1463040"/>
-            <a:ext cx="3840480" cy="3840480"/>
-          </a:xfrm>
-          <a:prstGeom prst="ellipse">
+            <a:off x="3291840" y="246888"/>
+            <a:ext cx="274320" cy="274320"/>
+          </a:xfrm>
+          <a:prstGeom prst="heart">
             <a:avLst/>
           </a:prstGeom>
           <a:solidFill>
-            <a:srgbClr val="D9FCF0"/>
+            <a:srgbClr val="7BEAC5"/>
           </a:solidFill>
           <a:ln>
             <a:noFill/>
@@ -4203,14 +4397,14 @@
         </p:nvSpPr>
         <p:spPr>
           <a:xfrm>
-            <a:off x="5760720" y="274320"/>
-            <a:ext cx="411480" cy="411480"/>
-          </a:xfrm>
-          <a:prstGeom prst="ellipse">
+            <a:off x="3017520" y="1572768"/>
+            <a:ext cx="822960" cy="22860"/>
+          </a:xfrm>
+          <a:prstGeom prst="rect">
             <a:avLst/>
           </a:prstGeom>
           <a:solidFill>
-            <a:srgbClr val="3EE0AA"/>
+            <a:srgbClr val="7BEAC5"/>
           </a:solidFill>
           <a:ln>
             <a:noFill/>
@@ -4226,52 +4420,14 @@
       </p:sp>
       <p:sp>
         <p:nvSpPr>
-          <p:cNvPr id="2" name="Title 1"/>
-          <p:cNvSpPr>
-            <a:spLocks noGrp="1"/>
-          </p:cNvSpPr>
-          <p:nvPr>
-            <p:ph type="title"/>
-          </p:nvPr>
-        </p:nvSpPr>
-        <p:spPr>
-          <a:xfrm>
-            <a:off x="640080" y="457200"/>
-            <a:ext cx="4389120" cy="868680"/>
-          </a:xfrm>
-        </p:spPr>
-        <p:txBody>
-          <a:bodyPr wrap="square" lIns="54864" rIns="54864" tIns="27432" bIns="27432" anchor="ctr">
-            <a:noAutofit/>
-          </a:bodyPr>
-          <a:lstStyle/>
-          <a:p>
-            <a:pPr algn="l">
-              <a:lnSpc>
-                <a:spcPct val="105000"/>
-              </a:lnSpc>
-            </a:pPr>
-            <a:r>
-              <a:rPr sz="2600" b="1" i="0">
-                <a:solidFill>
-                  <a:srgbClr val="12684B"/>
-                </a:solidFill>
-              </a:rPr>
-              <a:t>감사 일기 세 줄</a:t>
-            </a:r>
-          </a:p>
-        </p:txBody>
-      </p:sp>
-      <p:sp>
-        <p:nvSpPr>
-          <p:cNvPr id="5" name="번호"/>
+          <p:cNvPr id="5" name="상단 라벨"/>
           <p:cNvSpPr txBox="1"/>
           <p:nvPr/>
         </p:nvSpPr>
         <p:spPr>
           <a:xfrm>
-            <a:off x="640080" y="1691640"/>
-            <a:ext cx="2194560" cy="1280160"/>
+            <a:off x="640080" y="182880"/>
+            <a:ext cx="3657600" cy="274320"/>
           </a:xfrm>
           <a:prstGeom prst="rect">
             <a:avLst/>
@@ -4279,7 +4435,7 @@
           <a:noFill/>
         </p:spPr>
         <p:txBody>
-          <a:bodyPr wrap="square" lIns="54864" rIns="54864" tIns="27432" bIns="27432" anchor="t">
+          <a:bodyPr wrap="square" lIns="54864" rIns="54864" tIns="27432" bIns="27432" anchor="ctr">
             <a:noAutofit/>
           </a:bodyPr>
           <a:lstStyle/>
@@ -4290,9 +4446,85 @@
               </a:lnSpc>
             </a:pPr>
             <a:r>
+              <a:rPr sz="800" b="1" i="0" spc="250">
+                <a:solidFill>
+                  <a:srgbClr val="8E8780"/>
+                </a:solidFill>
+              </a:rPr>
+              <a:t>CARD NEWS</a:t>
+            </a:r>
+          </a:p>
+        </p:txBody>
+      </p:sp>
+      <p:sp>
+        <p:nvSpPr>
+          <p:cNvPr id="2" name="Title 1"/>
+          <p:cNvSpPr>
+            <a:spLocks noGrp="1"/>
+          </p:cNvSpPr>
+          <p:nvPr>
+            <p:ph type="title"/>
+          </p:nvPr>
+        </p:nvSpPr>
+        <p:spPr>
+          <a:xfrm>
+            <a:off x="1371600" y="640080"/>
+            <a:ext cx="4114800" cy="868680"/>
+          </a:xfrm>
+        </p:spPr>
+        <p:txBody>
+          <a:bodyPr wrap="square" lIns="54864" rIns="54864" tIns="27432" bIns="27432" anchor="ctr">
+            <a:noAutofit/>
+          </a:bodyPr>
+          <a:lstStyle/>
+          <a:p>
+            <a:pPr algn="ctr">
+              <a:lnSpc>
+                <a:spcPct val="105000"/>
+              </a:lnSpc>
+            </a:pPr>
+            <a:r>
+              <a:rPr sz="2600" b="1" i="0">
+                <a:solidFill>
+                  <a:srgbClr val="26231F"/>
+                </a:solidFill>
+              </a:rPr>
+              <a:t>감사 일기 세 줄</a:t>
+            </a:r>
+          </a:p>
+        </p:txBody>
+      </p:sp>
+      <p:sp>
+        <p:nvSpPr>
+          <p:cNvPr id="6" name="번호"/>
+          <p:cNvSpPr txBox="1"/>
+          <p:nvPr/>
+        </p:nvSpPr>
+        <p:spPr>
+          <a:xfrm>
+            <a:off x="640080" y="1874519"/>
+            <a:ext cx="2194560" cy="1280160"/>
+          </a:xfrm>
+          <a:prstGeom prst="rect">
+            <a:avLst/>
+          </a:prstGeom>
+          <a:noFill/>
+        </p:spPr>
+        <p:txBody>
+          <a:bodyPr wrap="square" lIns="54864" rIns="54864" tIns="27432" bIns="27432" anchor="t">
+            <a:noAutofit/>
+          </a:bodyPr>
+          <a:lstStyle/>
+          <a:p>
+            <a:pPr algn="l">
+              <a:lnSpc>
+                <a:spcPct val="115000"/>
+              </a:lnSpc>
+            </a:pPr>
+            <a:r>
               <a:rPr sz="6600" b="1" i="0">
                 <a:solidFill>
-                  <a:srgbClr val="3EE0AA"/>
+                  <a:srgbClr val="7BEAC5"/>
                 </a:solidFill>
               </a:rPr>
               <a:t>04</a:t>
@@ -4302,13 +4534,13 @@
       </p:sp>
       <p:sp>
         <p:nvSpPr>
-          <p:cNvPr id="6" name="본문"/>
+          <p:cNvPr id="7" name="본문"/>
           <p:cNvSpPr txBox="1"/>
           <p:nvPr/>
         </p:nvSpPr>
         <p:spPr>
           <a:xfrm>
-            <a:off x="640080" y="3154680"/>
+            <a:off x="640080" y="3337560"/>
             <a:ext cx="5577840" cy="2651760"/>
           </a:xfrm>
           <a:prstGeom prst="rect">
@@ -4330,7 +4562,7 @@
             <a:r>
               <a:rPr sz="2800" b="0" i="0">
                 <a:solidFill>
-                  <a:srgbClr val="2B2B2B"/>
+                  <a:srgbClr val="26231F"/>
                 </a:solidFill>
               </a:rPr>
               <a:t>오늘 고마웠던 일 세 가지를 적어 보세요.</a:t>
@@ -4340,13 +4572,13 @@
       </p:sp>
       <p:sp>
         <p:nvSpPr>
-          <p:cNvPr id="7" name="쪽 번호"/>
+          <p:cNvPr id="8" name="쪽 번호"/>
           <p:cNvSpPr txBox="1"/>
           <p:nvPr/>
         </p:nvSpPr>
         <p:spPr>
           <a:xfrm>
-            <a:off x="640080" y="6035040"/>
+            <a:off x="640080" y="5989320"/>
             <a:ext cx="5577840" cy="365760"/>
           </a:xfrm>
           <a:prstGeom prst="rect">
@@ -4390,7 +4622,7 @@
     <p:bg>
       <p:bgPr>
         <a:solidFill>
-          <a:srgbClr val="FFFFFF"/>
+          <a:srgbClr val="EAFDF7"/>
         </a:solidFill>
         <a:effectLst/>
       </p:bgPr>
@@ -4404,20 +4636,20 @@
       <p:grpSpPr/>
       <p:sp>
         <p:nvSpPr>
-          <p:cNvPr id="3" name="장식"/>
+          <p:cNvPr id="3" name="포인트"/>
           <p:cNvSpPr/>
           <p:nvPr/>
         </p:nvSpPr>
         <p:spPr>
           <a:xfrm>
-            <a:off x="4572000" y="-1463040"/>
-            <a:ext cx="3840480" cy="3840480"/>
-          </a:xfrm>
-          <a:prstGeom prst="ellipse">
+            <a:off x="3291840" y="246888"/>
+            <a:ext cx="274320" cy="274320"/>
+          </a:xfrm>
+          <a:prstGeom prst="heart">
             <a:avLst/>
           </a:prstGeom>
           <a:solidFill>
-            <a:srgbClr val="D9FCF0"/>
+            <a:srgbClr val="7BEAC5"/>
           </a:solidFill>
           <a:ln>
             <a:noFill/>
@@ -4439,14 +4671,14 @@
         </p:nvSpPr>
         <p:spPr>
           <a:xfrm>
-            <a:off x="5760720" y="274320"/>
-            <a:ext cx="411480" cy="411480"/>
-          </a:xfrm>
-          <a:prstGeom prst="ellipse">
+            <a:off x="3017520" y="1572768"/>
+            <a:ext cx="822960" cy="22860"/>
+          </a:xfrm>
+          <a:prstGeom prst="rect">
             <a:avLst/>
           </a:prstGeom>
           <a:solidFill>
-            <a:srgbClr val="3EE0AA"/>
+            <a:srgbClr val="7BEAC5"/>
           </a:solidFill>
           <a:ln>
             <a:noFill/>
@@ -4462,52 +4694,14 @@
       </p:sp>
       <p:sp>
         <p:nvSpPr>
-          <p:cNvPr id="2" name="Title 1"/>
-          <p:cNvSpPr>
-            <a:spLocks noGrp="1"/>
-          </p:cNvSpPr>
-          <p:nvPr>
-            <p:ph type="title"/>
-          </p:nvPr>
-        </p:nvSpPr>
-        <p:spPr>
-          <a:xfrm>
-            <a:off x="640080" y="457200"/>
-            <a:ext cx="4389120" cy="868680"/>
-          </a:xfrm>
-        </p:spPr>
-        <p:txBody>
-          <a:bodyPr wrap="square" lIns="54864" rIns="54864" tIns="27432" bIns="27432" anchor="ctr">
-            <a:noAutofit/>
-          </a:bodyPr>
-          <a:lstStyle/>
-          <a:p>
-            <a:pPr algn="l">
-              <a:lnSpc>
-                <a:spcPct val="105000"/>
-              </a:lnSpc>
-            </a:pPr>
-            <a:r>
-              <a:rPr sz="2600" b="1" i="0">
-                <a:solidFill>
-                  <a:srgbClr val="12684B"/>
-                </a:solidFill>
-              </a:rPr>
-              <a:t>엽서 한 장 쓰기</a:t>
-            </a:r>
-          </a:p>
-        </p:txBody>
-      </p:sp>
-      <p:sp>
-        <p:nvSpPr>
-          <p:cNvPr id="5" name="번호"/>
+          <p:cNvPr id="5" name="상단 라벨"/>
           <p:cNvSpPr txBox="1"/>
           <p:nvPr/>
         </p:nvSpPr>
         <p:spPr>
           <a:xfrm>
-            <a:off x="640080" y="1691640"/>
-            <a:ext cx="2194560" cy="1280160"/>
+            <a:off x="640080" y="182880"/>
+            <a:ext cx="3657600" cy="274320"/>
           </a:xfrm>
           <a:prstGeom prst="rect">
             <a:avLst/>
@@ -4515,7 +4709,7 @@
           <a:noFill/>
         </p:spPr>
         <p:txBody>
-          <a:bodyPr wrap="square" lIns="54864" rIns="54864" tIns="27432" bIns="27432" anchor="t">
+          <a:bodyPr wrap="square" lIns="54864" rIns="54864" tIns="27432" bIns="27432" anchor="ctr">
             <a:noAutofit/>
           </a:bodyPr>
           <a:lstStyle/>
@@ -4526,9 +4720,85 @@
               </a:lnSpc>
             </a:pPr>
             <a:r>
+              <a:rPr sz="800" b="1" i="0" spc="250">
+                <a:solidFill>
+                  <a:srgbClr val="8E8780"/>
+                </a:solidFill>
+              </a:rPr>
+              <a:t>CARD NEWS</a:t>
+            </a:r>
+          </a:p>
+        </p:txBody>
+      </p:sp>
+      <p:sp>
+        <p:nvSpPr>
+          <p:cNvPr id="2" name="Title 1"/>
+          <p:cNvSpPr>
+            <a:spLocks noGrp="1"/>
+          </p:cNvSpPr>
+          <p:nvPr>
+            <p:ph type="title"/>
+          </p:nvPr>
+        </p:nvSpPr>
+        <p:spPr>
+          <a:xfrm>
+            <a:off x="1371600" y="640080"/>
+            <a:ext cx="4114800" cy="868680"/>
+          </a:xfrm>
+        </p:spPr>
+        <p:txBody>
+          <a:bodyPr wrap="square" lIns="54864" rIns="54864" tIns="27432" bIns="27432" anchor="ctr">
+            <a:noAutofit/>
+          </a:bodyPr>
+          <a:lstStyle/>
+          <a:p>
+            <a:pPr algn="ctr">
+              <a:lnSpc>
+                <a:spcPct val="105000"/>
+              </a:lnSpc>
+            </a:pPr>
+            <a:r>
+              <a:rPr sz="2600" b="1" i="0">
+                <a:solidFill>
+                  <a:srgbClr val="26231F"/>
+                </a:solidFill>
+              </a:rPr>
+              <a:t>엽서 한 장 쓰기</a:t>
+            </a:r>
+          </a:p>
+        </p:txBody>
+      </p:sp>
+      <p:sp>
+        <p:nvSpPr>
+          <p:cNvPr id="6" name="번호"/>
+          <p:cNvSpPr txBox="1"/>
+          <p:nvPr/>
+        </p:nvSpPr>
+        <p:spPr>
+          <a:xfrm>
+            <a:off x="640080" y="1874519"/>
+            <a:ext cx="2194560" cy="1280160"/>
+          </a:xfrm>
+          <a:prstGeom prst="rect">
+            <a:avLst/>
+          </a:prstGeom>
+          <a:noFill/>
+        </p:spPr>
+        <p:txBody>
+          <a:bodyPr wrap="square" lIns="54864" rIns="54864" tIns="27432" bIns="27432" anchor="t">
+            <a:noAutofit/>
+          </a:bodyPr>
+          <a:lstStyle/>
+          <a:p>
+            <a:pPr algn="l">
+              <a:lnSpc>
+                <a:spcPct val="115000"/>
+              </a:lnSpc>
+            </a:pPr>
+            <a:r>
               <a:rPr sz="6600" b="1" i="0">
                 <a:solidFill>
-                  <a:srgbClr val="3EE0AA"/>
+                  <a:srgbClr val="7BEAC5"/>
                 </a:solidFill>
               </a:rPr>
               <a:t>05</a:t>
@@ -4538,13 +4808,13 @@
       </p:sp>
       <p:sp>
         <p:nvSpPr>
-          <p:cNvPr id="6" name="본문"/>
+          <p:cNvPr id="7" name="본문"/>
           <p:cNvSpPr txBox="1"/>
           <p:nvPr/>
         </p:nvSpPr>
         <p:spPr>
           <a:xfrm>
-            <a:off x="640080" y="3154680"/>
+            <a:off x="640080" y="3337560"/>
             <a:ext cx="5577840" cy="2651760"/>
           </a:xfrm>
           <a:prstGeom prst="rect">
@@ -4566,7 +4836,7 @@
             <a:r>
               <a:rPr sz="2800" b="0" i="0">
                 <a:solidFill>
-                  <a:srgbClr val="2B2B2B"/>
+                  <a:srgbClr val="26231F"/>
                 </a:solidFill>
               </a:rPr>
               <a:t>짧아도 좋아요. 우체통에 넣는 순간 설레요.</a:t>
@@ -4576,13 +4846,13 @@
       </p:sp>
       <p:sp>
         <p:nvSpPr>
-          <p:cNvPr id="7" name="쪽 번호"/>
+          <p:cNvPr id="8" name="쪽 번호"/>
           <p:cNvSpPr txBox="1"/>
           <p:nvPr/>
         </p:nvSpPr>
         <p:spPr>
           <a:xfrm>
-            <a:off x="640080" y="6035040"/>
+            <a:off x="640080" y="5989320"/>
             <a:ext cx="5577840" cy="365760"/>
           </a:xfrm>
           <a:prstGeom prst="rect">
@@ -4623,6 +4893,14 @@
 <file path=ppt/slides/slide7.xml><?xml version="1.0" encoding="utf-8"?>
 <p:sld xmlns:a="http://schemas.openxmlformats.org/drawingml/2006/main" xmlns:p="http://schemas.openxmlformats.org/presentationml/2006/main" xmlns:r="http://schemas.openxmlformats.org/officeDocument/2006/relationships">
   <p:cSld>
+    <p:bg>
+      <p:bgPr>
+        <a:solidFill>
+          <a:srgbClr val="27493E"/>
+        </a:solidFill>
+        <a:effectLst/>
+      </p:bgPr>
+    </p:bg>
     <p:spTree>
       <p:nvGrpSpPr>
         <p:cNvPr id="1" name=""/>
@@ -4630,30 +4908,102 @@
         <p:nvPr/>
       </p:nvGrpSpPr>
       <p:grpSpPr/>
-      <p:pic>
-        <p:nvPicPr>
-          <p:cNvPr id="3" name="표지 그림" descr="news-19.jpg"/>
-          <p:cNvPicPr>
-            <a:picLocks noChangeAspect="1"/>
-          </p:cNvPicPr>
+      <p:sp>
+        <p:nvSpPr>
+          <p:cNvPr id="3" name="장식"/>
+          <p:cNvSpPr/>
           <p:nvPr/>
-        </p:nvPicPr>
-        <p:blipFill>
-          <a:blip r:embed="rId2"/>
-          <a:stretch>
-            <a:fillRect/>
-          </a:stretch>
-        </p:blipFill>
-        <p:spPr>
-          <a:xfrm>
-            <a:off x="0" y="0"/>
-            <a:ext cx="6858000" cy="6858000"/>
+        </p:nvSpPr>
+        <p:spPr>
+          <a:xfrm>
+            <a:off x="1600200" y="822960"/>
+            <a:ext cx="3657600" cy="3657600"/>
+          </a:xfrm>
+          <a:prstGeom prst="ellipse">
+            <a:avLst/>
+          </a:prstGeom>
+          <a:solidFill>
+            <a:srgbClr val="7BEAC5"/>
+          </a:solidFill>
+          <a:ln>
+            <a:noFill/>
+          </a:ln>
+        </p:spPr>
+        <p:txBody>
+          <a:bodyPr rtlCol="0" anchor="ctr"/>
+          <a:lstStyle/>
+          <a:p>
+            <a:pPr algn="ctr"/>
+          </a:p>
+        </p:txBody>
+      </p:sp>
+      <p:sp>
+        <p:nvSpPr>
+          <p:cNvPr id="4" name="장식"/>
+          <p:cNvSpPr/>
+          <p:nvPr/>
+        </p:nvSpPr>
+        <p:spPr>
+          <a:xfrm>
+            <a:off x="3246120" y="502920"/>
+            <a:ext cx="822960" cy="822960"/>
+          </a:xfrm>
+          <a:prstGeom prst="ellipse">
+            <a:avLst/>
+          </a:prstGeom>
+          <a:solidFill>
+            <a:srgbClr val="5EB296"/>
+          </a:solidFill>
+          <a:ln>
+            <a:noFill/>
+          </a:ln>
+        </p:spPr>
+        <p:txBody>
+          <a:bodyPr rtlCol="0" anchor="ctr"/>
+          <a:lstStyle/>
+          <a:p>
+            <a:pPr algn="ctr"/>
+          </a:p>
+        </p:txBody>
+      </p:sp>
+      <p:sp>
+        <p:nvSpPr>
+          <p:cNvPr id="5" name="라벨"/>
+          <p:cNvSpPr txBox="1"/>
+          <p:nvPr/>
+        </p:nvSpPr>
+        <p:spPr>
+          <a:xfrm>
+            <a:off x="731520" y="4572000"/>
+            <a:ext cx="5394960" cy="274320"/>
           </a:xfrm>
           <a:prstGeom prst="rect">
             <a:avLst/>
           </a:prstGeom>
-        </p:spPr>
-      </p:pic>
+          <a:noFill/>
+        </p:spPr>
+        <p:txBody>
+          <a:bodyPr wrap="square" lIns="54864" rIns="54864" tIns="27432" bIns="27432" anchor="t">
+            <a:noAutofit/>
+          </a:bodyPr>
+          <a:lstStyle/>
+          <a:p>
+            <a:pPr algn="ctr">
+              <a:lnSpc>
+                <a:spcPct val="115000"/>
+              </a:lnSpc>
+            </a:pPr>
+            <a:r>
+              <a:rPr sz="1000" b="1" i="0" spc="250">
+                <a:solidFill>
+                  <a:srgbClr val="FFFFFF"/>
+                </a:solidFill>
+              </a:rPr>
+              <a:t>CARD NEWS</a:t>
+            </a:r>
+          </a:p>
+        </p:txBody>
+      </p:sp>
       <p:sp>
         <p:nvSpPr>
           <p:cNvPr id="2" name="Title 1"/>
@@ -4666,8 +5016,8 @@
         </p:nvSpPr>
         <p:spPr>
           <a:xfrm>
-            <a:off x="685800" y="960120"/>
-            <a:ext cx="5486400" cy="1463040"/>
+            <a:off x="731520" y="4892040"/>
+            <a:ext cx="5394960" cy="914400"/>
           </a:xfrm>
         </p:spPr>
         <p:txBody>
@@ -4676,7 +5026,7 @@
           </a:bodyPr>
           <a:lstStyle/>
           <a:p>
-            <a:pPr algn="l">
+            <a:pPr algn="ctr">
               <a:lnSpc>
                 <a:spcPct val="105000"/>
               </a:lnSpc>
@@ -4684,7 +5034,7 @@
             <a:r>
               <a:rPr sz="2800" b="1" i="0">
                 <a:solidFill>
-                  <a:srgbClr val="12684B"/>
+                  <a:srgbClr val="FFFFFF"/>
                 </a:solidFill>
               </a:rPr>
               <a:t>저장해 두고 필요할 때 꺼내 보세요</a:t>
@@ -4694,14 +5044,14 @@
       </p:sp>
       <p:sp>
         <p:nvSpPr>
-          <p:cNvPr id="4" name="한 줄 문구"/>
+          <p:cNvPr id="6" name="한 줄 문구"/>
           <p:cNvSpPr txBox="1"/>
           <p:nvPr/>
         </p:nvSpPr>
         <p:spPr>
           <a:xfrm>
-            <a:off x="685800" y="2560320"/>
-            <a:ext cx="5486400" cy="822960"/>
+            <a:off x="731520" y="5806440"/>
+            <a:ext cx="5394960" cy="822960"/>
           </a:xfrm>
           <a:prstGeom prst="rect">
             <a:avLst/>
@@ -4714,15 +5064,15 @@
           </a:bodyPr>
           <a:lstStyle/>
           <a:p>
-            <a:pPr algn="l">
+            <a:pPr algn="ctr">
               <a:lnSpc>
                 <a:spcPct val="115000"/>
               </a:lnSpc>
             </a:pPr>
             <a:r>
-              <a:rPr sz="1500" b="0" i="1">
+              <a:rPr sz="1500" b="0" i="0">
                 <a:solidFill>
-                  <a:srgbClr val="12684B"/>
+                  <a:srgbClr val="FFFFFF"/>
                 </a:solidFill>
               </a:rPr>
               <a:t>마음에 들면 공유해 주세요</a:t>
@@ -4732,14 +5082,14 @@
       </p:sp>
       <p:sp>
         <p:nvSpPr>
-          <p:cNvPr id="5" name="안내 문구"/>
+          <p:cNvPr id="7" name="안내 문구"/>
           <p:cNvSpPr txBox="1"/>
           <p:nvPr/>
         </p:nvSpPr>
         <p:spPr>
           <a:xfrm>
-            <a:off x="685800" y="3429000"/>
-            <a:ext cx="5486400" cy="914400"/>
+            <a:off x="731520" y="6675120"/>
+            <a:ext cx="5394960" cy="914400"/>
           </a:xfrm>
           <a:prstGeom prst="rect">
             <a:avLst/>
@@ -4752,7 +5102,7 @@
           </a:bodyPr>
           <a:lstStyle/>
           <a:p>
-            <a:pPr algn="l">
+            <a:pPr algn="ctr">
               <a:lnSpc>
                 <a:spcPct val="115000"/>
               </a:lnSpc>
@@ -4760,7 +5110,7 @@
             <a:r>
               <a:rPr sz="1200" b="0" i="0">
                 <a:solidFill>
-                  <a:srgbClr val="666666"/>
+                  <a:srgbClr val="FFFFFF"/>
                 </a:solidFill>
               </a:rPr>
               <a:t>이름 · 연락처를 입력하세요</a:t>
@@ -4787,34 +5137,34 @@
         <a:sysClr val="window" lastClr="FFFFFF"/>
       </a:lt1>
       <a:dk2>
-        <a:srgbClr val="12684B"/>
+        <a:srgbClr val="27493E"/>
       </a:dk2>
       <a:lt2>
-        <a:srgbClr val="F4FDFA"/>
+        <a:srgbClr val="EAFDF7"/>
       </a:lt2>
       <a:accent1>
-        <a:srgbClr val="3EE0AA"/>
+        <a:srgbClr val="7BEAC5"/>
       </a:accent1>
       <a:accent2>
-        <a:srgbClr val="1CA8C4"/>
+        <a:srgbClr val="9FE5EF"/>
       </a:accent2>
       <a:accent3>
-        <a:srgbClr val="12684B"/>
+        <a:srgbClr val="27493E"/>
       </a:accent3>
       <a:accent4>
-        <a:srgbClr val="D9FCF0"/>
+        <a:srgbClr val="D1FAEC"/>
       </a:accent4>
       <a:accent5>
-        <a:srgbClr val="2DC4B7"/>
+        <a:srgbClr val="8DE8DA"/>
       </a:accent5>
       <a:accent6>
-        <a:srgbClr val="71A493"/>
+        <a:srgbClr val="7D928B"/>
       </a:accent6>
       <a:hlink>
-        <a:srgbClr val="3EE0AA"/>
+        <a:srgbClr val="7BEAC5"/>
       </a:hlink>
       <a:folHlink>
-        <a:srgbClr val="12684B"/>
+        <a:srgbClr val="27493E"/>
       </a:folHlink>
     </a:clrScheme>
     <a:fontScheme name="Office">
